--- a/presentation/three-signals-one-story.pptx
+++ b/presentation/three-signals-one-story.pptx
@@ -33,9 +33,10 @@
     <p:sldId id="281" r:id="rId27"/>
     <p:sldId id="282" r:id="rId28"/>
     <p:sldId id="283" r:id="rId29"/>
+    <p:sldId id="284" r:id="rId30"/>
   </p:sldIdLst>
   <p:notesMasterIdLst>
-    <p:notesMasterId r:id="rId30"/>
+    <p:notesMasterId r:id="rId31"/>
   </p:notesMasterIdLst>
   <p:sldSz cx="9144000" cy="5143500"/>
   <p:notesSz cx="5143500" cy="9144000"/>
@@ -529,7 +530,10 @@
           <a:p>
             <a:r>
               <a:rPr lang="en-US" dirty="0"/>
-              <a:t/>
+              <a:t>Open with the dots. The three signals — traces, metrics, logs — are the canonical taxonomy of observability. Most observability tooling treats them as separate problems. This talk argues they're one problem, and OpenTelemetry is the unification.
+Quick intro: name, role, why I care about observability cost (not just observability).
+Energy: warm, conversational. We have a lot to cover; don't open slowly.
+Time check at this slide: 0:00 / 35 min.</a:t>
             </a:r>
             <a:endParaRPr lang="en-US" dirty="0"/>
           </a:p>
@@ -617,7 +621,10 @@
           <a:p>
             <a:r>
               <a:rPr lang="en-US" dirty="0"/>
-              <a:t/>
+              <a:t>Demo 02 setup. The trap: you have a metric `http_requests_total`. You add a label `user_id` because it sounded useful in standup. Now your metric has one time series per user. Active users? That's your series count. TSDB falls over at 10M series; many fall over at 1M.
+What we'll see live: an app that emits a metric with bounded labels (~100 series). Then we flip a feature flag that adds user_id as a label. Watch series count climb in real time.
+Then we watch the Collector's `transform` processor strip the offending label before it reaches Mimir. Same problem, fixed at the right architectural layer.
+Time: ~14 min.</a:t>
             </a:r>
             <a:endParaRPr lang="en-US" dirty="0"/>
           </a:p>
@@ -705,7 +712,17 @@
           <a:p>
             <a:r>
               <a:rPr lang="en-US" dirty="0"/>
-              <a:t/>
+              <a:t>LIVE DEMO. Estimate: 3-4 minutes.
+Demo flow:
+1. `./demo.sh` brings up the stack and starts low-card load (100 unique requests).
+2. Show Mimir's series count metric: ~100 series. Stable.
+3. Send a `POST /toggle-user-label` to flip the feature flag.
+4. Send 10,000 requests with unique user IDs. Watch series count climb.
+5. Mimir starts complaining about scrape limits.
+6. Apply the Collector config that strips `user_id` label. Reload.
+7. Series count plateaus. Crisis averted.
+Pacing: drive sustained traffic for 90+ seconds before pivoting. Internal scrape interval is 60s — need 2 samples for rate() to look right.
+[SCREENSHOT placeholder: Mimir series count graph showing the climb-and-plateau pattern.]</a:t>
             </a:r>
             <a:endParaRPr lang="en-US" dirty="0"/>
           </a:p>
@@ -793,7 +810,9 @@
           <a:p>
             <a:r>
               <a:rPr lang="en-US" dirty="0"/>
-              <a:t/>
+              <a:t>Recap. The lesson is architectural, not technical: high-cardinality data is for traces, where it's queryable. Metrics are for aggregates.
+The Collector pattern matters: enforce the limit at the edge of your platform, not in the storage layer at 3 AM.
+Time: ~18 min.</a:t>
             </a:r>
             <a:endParaRPr lang="en-US" dirty="0"/>
           </a:p>
@@ -881,7 +900,10 @@
           <a:p>
             <a:r>
               <a:rPr lang="en-US" dirty="0"/>
-              <a:t/>
+              <a:t>Demo 03 setup. The problem: at scale you can't keep every trace. Head sampling ("keep 10% randomly") is cheap but stupid — you might drop the slow requests and keep all the fast ones.
+Tail sampling waits until the trace completes, then decides based on properties: was it slow? Did it error? Did it touch a sensitive endpoint? Keep all the interesting ones, drop a fraction of the boring ones.
+The cost: tail sampling needs the full trace in memory. The Collector buffers spans for 30-60 seconds. That's the trade-off.
+Time: ~18 min.</a:t>
             </a:r>
             <a:endParaRPr lang="en-US" dirty="0"/>
           </a:p>
@@ -969,7 +991,15 @@
           <a:p>
             <a:r>
               <a:rPr lang="en-US" dirty="0"/>
-              <a:t/>
+              <a:t>LIVE DEMO. Estimate: 3-4 minutes.
+Demo flow:
+1. `./demo.sh` brings up Collector with tail_sampling configured.
+2. Show the policy in collector-config.yaml: 100% slow + errors, 1% fast successes.
+3. Run load: 95% fast/successful, 5% slow or erroring.
+4. Tempo trace count: total ingested vs. total kept.
+5. Spot-check that all the slow traces are present, and ~1% of fast ones.
+Watch the latency: traces appear in Tempo ~30s after they complete (the buffer window). Don't pivot too fast or it looks like nothing's happening.
+[SCREENSHOT placeholder: Collector dashboard showing total received vs. total exported, with the policy decision breakdown.]</a:t>
             </a:r>
             <a:endParaRPr lang="en-US" dirty="0"/>
           </a:p>
@@ -1057,7 +1087,9 @@
           <a:p>
             <a:r>
               <a:rPr lang="en-US" dirty="0"/>
-              <a:t/>
+              <a:t>Recap.
+The mental model: the Collector becomes a circuit breaker for your observability data. You decide what survives. The application doesn't have to know.
+Time: ~22 min.</a:t>
             </a:r>
             <a:endParaRPr lang="en-US" dirty="0"/>
           </a:p>
@@ -1145,7 +1177,10 @@
           <a:p>
             <a:r>
               <a:rPr lang="en-US" dirty="0"/>
-              <a:t/>
+              <a:t>Demo 04 setup. JVM metrics are the test case where observability moves from "nice to have" to "how do you debug production at all."
+What we'll show: same app, same load, three different garbage collectors. Each leaves a different shape on the dashboard. You can identify the GC from the chart without being told.
+Why it matters: GC choice is an operational decision that you can verify with telemetry. Don't pick a GC because of a blog post; pick it because you measured it in your environment.
+Time: ~22 min.</a:t>
             </a:r>
             <a:endParaRPr lang="en-US" dirty="0"/>
           </a:p>
@@ -1233,7 +1268,15 @@
           <a:p>
             <a:r>
               <a:rPr lang="en-US" dirty="0"/>
-              <a:t/>
+              <a:t>LIVE DEMO. Estimate: 4 minutes.
+Demo flow:
+1. `./demo.sh` runs the same app three times, swapping the GC flag each time.
+2. After each run, Grafana dashboard shows: heap usage, GC frequency, pause durations.
+3. Side-by-side comparison panel at the end.
+4. Point out the visible differences: G1 has occasional 50-100ms pauses, Shenandoah and ZGC stay under 10ms.
+Pre-restart Grafana 60+ seconds before showing the dashboard — provisioning is async after the container reports started.
+Hard browser refresh (Ctrl+Shift+R) after switching dashboards — Grafana caches panel definitions.
+[SCREENSHOT placeholder: Three-GC comparison dashboard at end of demo, showing distinct pause profiles.]</a:t>
             </a:r>
             <a:endParaRPr lang="en-US" dirty="0"/>
           </a:p>
@@ -1321,7 +1364,9 @@
           <a:p>
             <a:r>
               <a:rPr lang="en-US" dirty="0"/>
-              <a:t/>
+              <a:t>Recap. The point is empirical: don't guess about GC. Measure.
+Note for accuracy (we verified this in prep): UBI9 OpenJDK ergonomically picks G1 by default on every variant we tested (17, 21, 25; both builder and runtime). Shenandoah is *available* — Red Hat compiles it in — it's just not selected by JVM ergonomics. One flag activates it.
+Time: ~26 min.</a:t>
             </a:r>
             <a:endParaRPr lang="en-US" dirty="0"/>
           </a:p>
@@ -1409,7 +1454,11 @@
           <a:p>
             <a:r>
               <a:rPr lang="en-US" dirty="0"/>
-              <a:t/>
+              <a:t>The problem: a typical Spring Boot app on JDK 21 took 5-8 seconds to boot. That's fine for long-running services, but it's an eternity for serverless or scale-from-zero workloads.
+Project Leyden is the JDK's response. Started years ago, productized in JDK 24/25. The big shipped feature is JEP 514 — AOT cache. Cache classloading work and JIT profiles to disk during a training run; reuse them at startup.
+Spring Boot 4 also has its own AOT layer that pre-computes bean factory state at build time. Combined, they should reduce startup substantially.
+We're going to measure exactly how much.
+Time: ~26 min.</a:t>
             </a:r>
             <a:endParaRPr lang="en-US" dirty="0"/>
           </a:p>
@@ -1497,7 +1546,11 @@
           <a:p>
             <a:r>
               <a:rPr lang="en-US" dirty="0"/>
-              <a:t/>
+              <a:t>Three columns: the problem, the pitch, the proof.
+Don't read every bullet. Pick one from each column to anchor: "trace IDs don't reach the logs" (left) → "cross-signal correlation by trace_id" (middle) → "all three signals, one trace_id" (right). That's the throughline of the whole talk.
+OpenTelemetry's promises are mostly true. The practitioner's question is: at what cost? That's what we'll measure.
+[OPTIONAL: insert real-world story here — an outage you've seen where signals didn't correlate. 30s anecdote.]
+Time: ~2 min.</a:t>
             </a:r>
             <a:endParaRPr lang="en-US" dirty="0"/>
           </a:p>
@@ -1585,7 +1638,15 @@
           <a:p>
             <a:r>
               <a:rPr lang="en-US" dirty="0"/>
-              <a:t/>
+              <a:t>The pipeline. Four Docker stages.
+1. Build: standard mvn package, produces Spring Boot fat JAR.
+2. Extract: Spring Boot's tools jarmode unpacks the fat JAR into a flat layout. The JDK's AOT cache can't see classes inside nested JARs through Spring Boot's custom classloader — extracting first solves that.
+3. Cache: boot the extracted app with -XX:AOTCacheOutput. Use spring.context.exit=onRefresh to exit cleanly right after Spring's bean factory is populated. That clean exit is what triggers the cache write. Result: ~120 MB binary cache.
+4. Runtime: ship extracted layout + cache. Launch with -XX:AOTCache=app.aot.
+We landed on this design after a lot of trial and error. Piotr Minkowski's writeup from March 2026 was the breakthrough — the onRefresh trick is the key piece most online tutorials miss.
+Quarkus does this entirely differently — we'll get to that in two slides.
+[DIAGRAM placeholder: a fuller pipeline diagram showing the JVM that does the training match the JVM that runs the cache. We hit a real bug here where Temurin-trained caches were rejected by Red Hat OpenJDK at runtime.]
+Time: ~28 min.</a:t>
             </a:r>
             <a:endParaRPr lang="en-US" dirty="0"/>
           </a:p>
@@ -1673,7 +1734,21 @@
           <a:p>
             <a:r>
               <a:rPr lang="en-US" dirty="0"/>
-              <a:t/>
+              <a:t>LIVE DEMO. This is the headline. Estimate: 5 minutes.
+Demo flow:
+1. `./demo.sh time-all` runs 24 cold starts (3 per variant, 8 variants).
+2. Talk while it runs — explain what each variant tests:
+   - Spring Classic + agent
+   - Spring Classic + SDK telemetry (Spring Boot 4's new opentelemetry starter)
+   - Spring Classic, no telemetry (control)
+   - Spring AOT + agent
+   - Spring AOT + SDK
+   - Spring AOT, no telemetry
+   - Quarkus baseline (no telemetry)
+   - Quarkus + Leyden (no telemetry)
+3. Final cross-framework table prints automatically.
+Pacing: this takes ~10 minutes to run. Talk during the runs. Show the running terminal as the medians come in. The drama is the contrast between Spring Boot's slow Classic and Quarkus's tiny Leyden.
+If something fails: we have pre-recorded numbers in TALK-NOTES.md. The rebuild fallback is to skip live and go to the next slide with the pre-baked table.</a:t>
             </a:r>
             <a:endParaRPr lang="en-US" dirty="0"/>
           </a:p>
@@ -1761,7 +1836,15 @@
           <a:p>
             <a:r>
               <a:rPr lang="en-US" dirty="0"/>
-              <a:t/>
+              <a:t>Money slide #1 — Spring Boot 4 telemetry comparison.
+Read the table left to right, top to bottom. Then the three callouts below.
+Key talking points:
+- Agent costs ~750ms regardless of whether AOT is on. This is consistent runtime instrumentation overhead.
+- SDK is essentially free. Spring Boot 4's new OpenTelemetry starter shipped November 2025; it's the modern answer.
+- AOT cache saves ~700ms (~18%). Real, measurable, but modest. Nothing like the dramatic numbers you may have read about.
+The 18% number is honest. AOT cache speeds classloading. JPA initialization is mostly post-classloading work — connection pool setup, schema introspection, entity metamodel. AOT can't accelerate any of that.
+This is the realistic Spring Boot 4 production picture. Now — same JDK, same Leyden flag, different framework. Watch what happens.
+Time: ~32 min.</a:t>
             </a:r>
             <a:endParaRPr lang="en-US" dirty="0"/>
           </a:p>
@@ -1849,7 +1932,18 @@
           <a:p>
             <a:r>
               <a:rPr lang="en-US" dirty="0"/>
-              <a:t/>
+              <a:t>Money slide #2 — and the talk's actual punchline.
+Same JDK 25. Same -XX:AOTCache flag. Same Project Leyden underneath. Two side-by-side cards.
+Spring Boot 4: 3954ms baseline → 3252ms with AOT. Saves about 700ms, ~18%.
+Quarkus 3.33: 787ms baseline → 181ms with AOT. Saves about 600ms, ~77%.
+Two findings worth pausing on:
+1. Quarkus's BASELINE is faster than Spring Boot WITH AOT. Quarkus, no flags, beats fully optimized Spring Boot at startup.
+2. Same flag, very different leverage. The reason isn't Leyden — it's framework architecture.
+Spring Boot does its bean discovery, autoconfiguration evaluation, and JPA initialization at runtime. AOT cache only helps with classloading; the rest can't be cached.
+Quarkus does almost all of that at BUILD time. The application that boots is mostly pre-baked. AOT cache amplifies an already-fast startup.
+Takeaway: AOT cache is a JVM feature. How much it helps depends on what your framework does at startup. Your framework, not your vendor, is the cold-start lever.
+[OPTIONAL: 30s on the implications. If your workload is serverless, this picks the framework. If it's long-running, the agent tax disappears in 5 minutes anyway.]
+Time: ~33 min.</a:t>
             </a:r>
             <a:endParaRPr lang="en-US" dirty="0"/>
           </a:p>
@@ -1937,7 +2031,12 @@
           <a:p>
             <a:r>
               <a:rPr lang="en-US" dirty="0"/>
-              <a:t/>
+              <a:t>The conclusion of Demo 05. Big text, dark slide — let it breathe.
+This is where I hand the audience an actual decision-making framework, not just numbers. The agent vs SDK question used to be theological — "agents are easier, SDKs are cleaner." Now it's empirical: the agent costs about 750ms, the SDK is free. That cost matters or it doesn't, depending on whether you cold-start often.
+Long-running services: 750ms doesn't matter. The agent's runtime overhead is also negligible after warmup. Use the agent. Less code change.
+Serverless / scale-from-zero / cold-scaling Kubernetes: 750ms is everything. Use the SDK starter. Modernize your tooling.
+And if cold-scale really matters, look at Quarkus. Same Leyden, 4x the leverage.
+Time: ~34 min. Heading into close.</a:t>
             </a:r>
             <a:endParaRPr lang="en-US" dirty="0"/>
           </a:p>
@@ -2025,7 +2124,13 @@
           <a:p>
             <a:r>
               <a:rPr lang="en-US" dirty="0"/>
-              <a:t/>
+              <a:t>The summary. Three things you can take to your team Monday morning.
+Each takeaway maps to a demo:
+1. Correlation: Demo 01
+2. Cardinality: Demo 02 (and the principle from Demo 03)
+3. Telemetry-to-workload: Demo 05
+Don't read the long descriptions. Just announce the three titles and let the audience read the details. Confidence in delivery here is more important than coverage.
+Time: ~35 min.</a:t>
             </a:r>
             <a:endParaRPr lang="en-US" dirty="0"/>
           </a:p>
@@ -2113,7 +2218,9 @@
           <a:p>
             <a:r>
               <a:rPr lang="en-US" dirty="0"/>
-              <a:t/>
+              <a:t>Resources slide. Don't read the URLs. Just point to the repo URL at the top. "Everything I showed today is in this repo. Clone it, run any demo, send me a PR."
+[OPTIONAL: have a QR code for the GitHub URL. Many in the audience won't be able to type a URL from a slide while listening.]
+Time: ~35 min.</a:t>
             </a:r>
             <a:endParaRPr lang="en-US" dirty="0"/>
           </a:p>
@@ -2201,7 +2308,18 @@
           <a:p>
             <a:r>
               <a:rPr lang="en-US" dirty="0"/>
-              <a:t/>
+              <a:t>Q&amp;A. Common questions to anticipate:
+Q: "Doesn't GraalVM native image beat both of these?"
+A: Yes — for cold start. Native image is ~50ms. Trade-off: build is 5-10 min, no JFR, restricted reflection, no dynamic class loading. Different commitment level. If cold start is the only metric, go native.
+Q: "Why not use the OTel agent with Quarkus?"
+A: You can. Quarkus has native OTel support though — `quarkus-opentelemetry` extension. SDK approach with Quarkus's build-time wiring is the canonical pattern.
+Q: "What about Micronaut?"
+A: Same family as Quarkus — build-time wiring framework. I'd expect similar AOT cache numbers. Haven't tested, would love to see a PR with measurements.
+Q: "How representative is your JPA app?"
+A: It's a deliberate medium-weight app: H2 + 1 JPA repository + 6 entities + REST + actuator + scheduler. Smaller apps see less Spring Boot AOT savings; larger apps see more. Quarkus relative numbers are stable across app size.
+Q: "Does this matter for non-cold-start workloads?"
+A: Less so. The agent tax doesn't compound for long-running services. AOT cache memory savings (resident set size) are still real, but startup latency is the headline.
+If no questions: thank, repo URL, off.</a:t>
             </a:r>
             <a:endParaRPr lang="en-US" dirty="0"/>
           </a:p>
@@ -2289,7 +2407,10 @@
           <a:p>
             <a:r>
               <a:rPr lang="en-US" dirty="0"/>
-              <a:t/>
+              <a:t>Bonus slide — only show if there's time and someone asks about GC.
+The honest framing: UBI9 OpenJDK ergonomically picks G1, on every variant we tested (17, 21, 25; both builder and runtime images). G1 is the JVM's default for server-class machines.
+Shenandoah is *available* — Red Hat compiles it in — it's just not selected by the JVM's ergonomics. One flag activates it. Worth knowing about for low-pause workloads.
+Don't use this slide if I'm tight on time. The Demo 04 recap covered the substance.</a:t>
             </a:r>
             <a:endParaRPr lang="en-US" dirty="0"/>
           </a:p>
@@ -2313,6 +2434,99 @@
             <a:fld id="{F7021451-1387-4CA6-816F-3879F97B5CBC}" type="slidenum">
               <a:rPr lang="en-US"/>
               <a:t>28</a:t>
+            </a:fld>
+            <a:endParaRPr lang="en-US"/>
+          </a:p>
+        </p:txBody>
+      </p:sp>
+    </p:spTree>
+    <p:extLst>
+      <p:ext uri="{BB962C8B-B14F-4D97-AF65-F5344CB8AC3E}">
+        <p14:creationId xmlns:p14="http://schemas.microsoft.com/office/powerpoint/2010/main" val="1024086991"/>
+      </p:ext>
+    </p:extLst>
+  </p:cSld>
+  <p:clrMapOvr>
+    <a:masterClrMapping/>
+  </p:clrMapOvr>
+</p:notes>
+</file>
+
+<file path=ppt/notesSlides/notesSlide29.xml><?xml version="1.0" encoding="utf-8"?>
+<p:notes xmlns:a="http://schemas.openxmlformats.org/drawingml/2006/main" xmlns:r="http://schemas.openxmlformats.org/officeDocument/2006/relationships" xmlns:p="http://schemas.openxmlformats.org/presentationml/2006/main">
+  <p:cSld>
+    <p:spTree>
+      <p:nvGrpSpPr>
+        <p:cNvPr id="1" name=""/>
+        <p:cNvGrpSpPr/>
+        <p:nvPr/>
+      </p:nvGrpSpPr>
+      <p:grpSpPr>
+        <a:xfrm>
+          <a:off x="0" y="0"/>
+          <a:ext cx="0" cy="0"/>
+          <a:chOff x="0" y="0"/>
+          <a:chExt cx="0" cy="0"/>
+        </a:xfrm>
+      </p:grpSpPr>
+      <p:sp>
+        <p:nvSpPr>
+          <p:cNvPr id="2" name="Slide Image Placeholder 1"/>
+          <p:cNvSpPr>
+            <a:spLocks noGrp="1" noRot="1" noChangeAspect="1"/>
+          </p:cNvSpPr>
+          <p:nvPr>
+            <p:ph type="sldImg"/>
+          </p:nvPr>
+        </p:nvSpPr>
+        <p:spPr/>
+      </p:sp>
+      <p:sp>
+        <p:nvSpPr>
+          <p:cNvPr id="3" name="Notes Placeholder 2"/>
+          <p:cNvSpPr>
+            <a:spLocks noGrp="1"/>
+          </p:cNvSpPr>
+          <p:nvPr>
+            <p:ph type="body" idx="1"/>
+          </p:nvPr>
+        </p:nvSpPr>
+        <p:spPr/>
+        <p:txBody>
+          <a:bodyPr/>
+          <a:lstStyle/>
+          <a:p>
+            <a:r>
+              <a:rPr lang="en-US" dirty="0"/>
+              <a:t>Bonus slide — show only if there's time, otherwise it's in the repo README.
+The point: clone, cd, ./demo.sh. Five commands and you have everything I just showed running on your laptop.
+Common questions about prereqs:
+- Does it work on macOS? Probably; podman runs on macOS but I haven't tested.
+- Does it work on Windows? Probably with WSL2; not tested.
+- Why podman not Docker? Personal preference. The compose files should work in both.</a:t>
+            </a:r>
+            <a:endParaRPr lang="en-US" dirty="0"/>
+          </a:p>
+        </p:txBody>
+      </p:sp>
+      <p:sp>
+        <p:nvSpPr>
+          <p:cNvPr id="4" name="Slide Number Placeholder 3"/>
+          <p:cNvSpPr>
+            <a:spLocks noGrp="1"/>
+          </p:cNvSpPr>
+          <p:nvPr>
+            <p:ph type="sldNum" sz="quarter" idx="10"/>
+          </p:nvPr>
+        </p:nvSpPr>
+        <p:spPr/>
+        <p:txBody>
+          <a:bodyPr/>
+          <a:lstStyle/>
+          <a:p>
+            <a:fld id="{F7021451-1387-4CA6-816F-3879F97B5CBC}" type="slidenum">
+              <a:rPr lang="en-US"/>
+              <a:t>29</a:t>
             </a:fld>
             <a:endParaRPr lang="en-US"/>
           </a:p>
@@ -2377,7 +2591,11 @@
           <a:p>
             <a:r>
               <a:rPr lang="en-US" dirty="0"/>
-              <a:t/>
+              <a:t>Roadmap. Don't read all five — gesture down the list and call out: "this builds. We'll start with the foundation, the trace_id flowing through everything, and end somewhere most observability talks don't go: measuring what observability actually costs at startup."
+Demos 01-04 are about correctness — making observability work. Demo 05 is about cost — what you pay for the work.
+Reproducibility commitment: all five demos run on a laptop with podman. No cloud account, no credentials, no kubernetes cluster. The full Grafana/Tempo/Mimir/Loki/Collector stack is one container.
+[OPTIONAL: show GitHub repo URL on screen briefly]
+Time: ~3 min.</a:t>
             </a:r>
             <a:endParaRPr lang="en-US" dirty="0"/>
           </a:p>
@@ -2465,7 +2683,13 @@
           <a:p>
             <a:r>
               <a:rPr lang="en-US" dirty="0"/>
-              <a:t/>
+              <a:t>Two minutes here. Brief but make sure each color sticks — purple traces, amber metrics, cyan logs. These colors recur across the whole deck and on the dashboards we'll see in the demos.
+Each signal has a strength and a failure mode:
+- Traces are amazing for finding bottlenecks but you can't keep all of them. Sampling is mandatory.
+- Metrics are cheap and great for alerts, but adding the wrong label to a metric can take down your TSDB. Demo 02 is the cardinality bomb.
+- Logs have the highest fidelity but the volume can crush your storage budget. 
+What we want is the strengths of all three correlated by one trace_id, with the cost trade-offs explicit.
+Time: ~5 min.</a:t>
             </a:r>
             <a:endParaRPr lang="en-US" dirty="0"/>
           </a:p>
@@ -2553,7 +2777,11 @@
           <a:p>
             <a:r>
               <a:rPr lang="en-US" dirty="0"/>
-              <a:t/>
+              <a:t>Walk left to right. The application doesn't change shape; it emits OTLP. From there, instrumentation choices vary: a Java agent that rewrites bytecode at startup, or an SDK linked into the app at compile time.
+Both produce OTLP. OTLP is HTTP/protobuf or gRPC, port 4318 by convention. Protocol-level standardization is what makes vendor neutrality real — you can swap Tempo for Jaeger, Mimir for Cortex, Loki for Elasticsearch, without touching the application.
+The Collector is the underrated piece. It's where you do filtering, sampling, aggregation, redaction, routing, format translation. Demo 02 and Demo 03 both live in the Collector.
+Important context for the rest of the talk: as of November 2025, Spring Boot 4 ships a native OpenTelemetry starter. You no longer need the Java agent for Spring Boot apps — there's a real SDK alternative now. Demo 05 measures both.
+Time: ~7 min.</a:t>
             </a:r>
             <a:endParaRPr lang="en-US" dirty="0"/>
           </a:p>
@@ -2641,7 +2869,11 @@
           <a:p>
             <a:r>
               <a:rPr lang="en-US" dirty="0"/>
-              <a:t/>
+              <a:t>Stack overview. Grafana's `otel-lgtm` image is the underrated hero of this talk — Grafana plus Loki, Grafana plus Tempo, Grafana plus Mimir, all bundled. One container, ~600 MB.
+Each demo runs in its own compose file with its own port range (3005, 3006, etc.) so I can leave one demo running while bringing up the next.
+If anyone in the audience wants to follow along: clone the repo, `cd demo-01-three-signals`, `./demo.sh`. That's the entire on-ramp.
+[SCREENSHOT placeholder: Grafana home page with the three datasources visible — Tempo, Mimir, Loki — to anchor the visual before we go live.]
+Time: ~9 min. (Foundation done. Now the demos.)</a:t>
             </a:r>
             <a:endParaRPr lang="en-US" dirty="0"/>
           </a:p>
@@ -2729,7 +2961,11 @@
           <a:p>
             <a:r>
               <a:rPr lang="en-US" dirty="0"/>
-              <a:t/>
+              <a:t>Setup for Demo 01. The simplest demo, but it's the foundation everything else builds on.
+Key concept: trace_id is a 128-bit identifier. The agent generates it for the inbound HTTP request and propagates it down through the call stack. Logback's MDC picks it up. Micrometer attaches it to metric exemplars.
+What you're going to see: I hit the service with a single curl. Then in Grafana I find a slow trace in Tempo. From the trace, I jump to the logs for the same trace_id with one click. From the logs, I jump to a metric chart showing the same request's latency.
+If this works, we have a unified observability platform. If it doesn't, we're back to grep across servers.
+Time: ~10 min.</a:t>
             </a:r>
             <a:endParaRPr lang="en-US" dirty="0"/>
           </a:p>
@@ -2817,7 +3053,20 @@
           <a:p>
             <a:r>
               <a:rPr lang="en-US" dirty="0"/>
-              <a:t/>
+              <a:t>LIVE DEMO. Estimate: 4 minutes.
+Demo flow:
+1. `./demo.sh` brings up the service + lgtm + Collector. Wait for green checkmarks.
+2. Hit `/api/hello` 3-4 times in the terminal. Show response.
+3. Open Grafana (localhost:3001). Show the dashboard.
+4. Pick a trace in Tempo. Show the span tree. Highlight trace_id.
+5. Click "Logs for this trace" → Loki shows correlated log lines.
+6. Click on a metric exemplar dot → jumps back to the trace.
+If something fails:
+- Service didn't come up: `podman logs demo01-app | tail -30`
+- Grafana datasource red: wait 60s, refresh; provisioning is async
+- No traces yet: send 5 more requests, the Collector batches
+Fallback: pre-recorded screencap on USB stick if everything is on fire.
+[SCREENSHOT placeholder: Grafana trace view with logs panel below — backup in case the live demo fails.]</a:t>
             </a:r>
             <a:endParaRPr lang="en-US" dirty="0"/>
           </a:p>
@@ -2905,7 +3154,10 @@
           <a:p>
             <a:r>
               <a:rPr lang="en-US" dirty="0"/>
-              <a:t/>
+              <a:t>After the live demo, take 30 seconds here to anchor the takeaway: correlation is a *platform* property. You can't bolt it on after an incident.
+Foreshadow Demo 05: the agent that made all this work has a runtime cost we'll measure later.
+Foreshadow Demos 02 and 03: the Collector that we just glossed over is where the next two demos live.
+Time: ~14 min.</a:t>
             </a:r>
             <a:endParaRPr lang="en-US" dirty="0"/>
           </a:p>
@@ -3449,7 +3701,7 @@
                 <a:ea typeface="Calibri" pitchFamily="34" charset="-122"/>
                 <a:cs typeface="Calibri" pitchFamily="34" charset="-120"/>
               </a:rPr>
-              <a:t>Cloud-Native Observability with OpenTelemetry on OpenShift</a:t>
+              <a:t>What Observability Actually Costs in Containers</a:t>
             </a:r>
             <a:endParaRPr lang="en-US" sz="1800" dirty="0"/>
           </a:p>
@@ -3488,7 +3740,7 @@
                 <a:ea typeface="Calibri" pitchFamily="34" charset="-122"/>
                 <a:cs typeface="Calibri" pitchFamily="34" charset="-120"/>
               </a:rPr>
-              <a:t>[Speaker name]  ·  [Conference / date]</a:t>
+              <a:t>[Speaker name]  ·  WeAreDevelopers World Congress NA  ·  [date]</a:t>
             </a:r>
             <a:endParaRPr lang="en-US" sz="1200" dirty="0"/>
           </a:p>
@@ -6118,7 +6370,7 @@
               <a:buNone/>
             </a:pPr>
             <a:r>
-              <a:rPr lang="en-US" sz="3200" b="1" dirty="0">
+              <a:rPr lang="en-US" sz="3000" b="1" dirty="0">
                 <a:solidFill>
                   <a:srgbClr val="0F172A"/>
                 </a:solidFill>
@@ -6126,9 +6378,9 @@
                 <a:ea typeface="Calibri" pitchFamily="34" charset="-122"/>
                 <a:cs typeface="Calibri" pitchFamily="34" charset="-120"/>
               </a:rPr>
-              <a:t>AOT Cold Start</a:t>
-            </a:r>
-            <a:endParaRPr lang="en-US" sz="3200" dirty="0"/>
+              <a:t>Cold Start: What Telemetry Costs</a:t>
+            </a:r>
+            <a:endParaRPr lang="en-US" sz="3000" dirty="0"/>
           </a:p>
         </p:txBody>
       </p:sp>
@@ -6474,7 +6726,7 @@
                 <a:ea typeface="Calibri" pitchFamily="34" charset="-122"/>
                 <a:cs typeface="Calibri" pitchFamily="34" charset="-120"/>
               </a:rPr>
-              <a:t>JDK 25: AOT cache (JEP 514) - production-ready</a:t>
+              <a:t>JDK 25: AOT cache (JEP 514) — production-ready</a:t>
             </a:r>
             <a:endParaRPr lang="en-US" sz="1300" dirty="0"/>
           </a:p>
@@ -7881,7 +8133,7 @@
                 <a:ea typeface="Consolas" pitchFamily="34" charset="-122"/>
                 <a:cs typeface="Consolas" pitchFamily="34" charset="-120"/>
               </a:rPr>
-              <a:t> -Dspring.context.exit=onRefresh</a:t>
+              <a:t>  -Dspring.context.exit=onRefresh</a:t>
             </a:r>
             <a:endParaRPr lang="en-US" sz="900" dirty="0"/>
           </a:p>
@@ -8836,7 +9088,7 @@
                           <a:ea typeface="Consolas" pitchFamily="34" charset="-122"/>
                           <a:cs typeface="Consolas" pitchFamily="34" charset="-120"/>
                         </a:rPr>
-                        <a:t>8.2 s</a:t>
+                        <a:t>4.7 s</a:t>
                       </a:r>
                       <a:endParaRPr lang="en-US" sz="1800" dirty="0">
                         <a:latin typeface="Consolas" charset="0"/>
@@ -8901,7 +9153,7 @@
                           <a:ea typeface="Consolas" pitchFamily="34" charset="-122"/>
                           <a:cs typeface="Consolas" pitchFamily="34" charset="-120"/>
                         </a:rPr>
-                        <a:t>5.3 s</a:t>
+                        <a:t>4.0 s</a:t>
                       </a:r>
                       <a:endParaRPr lang="en-US" sz="1800" dirty="0">
                         <a:latin typeface="Consolas" charset="0"/>
@@ -8966,7 +9218,7 @@
                           <a:ea typeface="Consolas" pitchFamily="34" charset="-122"/>
                           <a:cs typeface="Consolas" pitchFamily="34" charset="-120"/>
                         </a:rPr>
-                        <a:t>4.5 s</a:t>
+                        <a:t>4.0 s</a:t>
                       </a:r>
                       <a:endParaRPr lang="en-US" sz="1800" dirty="0">
                         <a:latin typeface="Consolas" charset="0"/>
@@ -9101,7 +9353,7 @@
                           <a:ea typeface="Consolas" pitchFamily="34" charset="-122"/>
                           <a:cs typeface="Consolas" pitchFamily="34" charset="-120"/>
                         </a:rPr>
-                        <a:t>7.4 s</a:t>
+                        <a:t>4.3 s</a:t>
                       </a:r>
                       <a:endParaRPr lang="en-US" sz="1800" dirty="0">
                         <a:latin typeface="Consolas" charset="0"/>
@@ -9166,7 +9418,7 @@
                           <a:ea typeface="Consolas" pitchFamily="34" charset="-122"/>
                           <a:cs typeface="Consolas" pitchFamily="34" charset="-120"/>
                         </a:rPr>
-                        <a:t>4.4 s</a:t>
+                        <a:t>3.3 s</a:t>
                       </a:r>
                       <a:endParaRPr lang="en-US" sz="1800" dirty="0">
                         <a:latin typeface="Consolas" charset="0"/>
@@ -9231,7 +9483,7 @@
                           <a:ea typeface="Consolas" pitchFamily="34" charset="-122"/>
                           <a:cs typeface="Consolas" pitchFamily="34" charset="-120"/>
                         </a:rPr>
-                        <a:t>3.9 s</a:t>
+                        <a:t>3.3 s</a:t>
                       </a:r>
                       <a:endParaRPr lang="en-US" sz="1800" dirty="0">
                         <a:latin typeface="Consolas" charset="0"/>
@@ -9396,7 +9648,7 @@
                 <a:ea typeface="Calibri" pitchFamily="34" charset="-122"/>
                 <a:cs typeface="Calibri" pitchFamily="34" charset="-120"/>
               </a:rPr>
-              <a:t>~3.5 s — runtime instrumentation cost</a:t>
+              <a:t>~750 ms — runtime instrumentation cost</a:t>
             </a:r>
             <a:endParaRPr lang="en-US" sz="1300" dirty="0"/>
           </a:p>
@@ -9514,7 +9766,7 @@
                 <a:ea typeface="Calibri" pitchFamily="34" charset="-122"/>
                 <a:cs typeface="Calibri" pitchFamily="34" charset="-120"/>
               </a:rPr>
-              <a:t>&lt;1 s — ~5x cheaper than agent</a:t>
+              <a:t>~30 ms — basically free</a:t>
             </a:r>
             <a:endParaRPr lang="en-US" sz="1300" dirty="0"/>
           </a:p>
@@ -9632,7 +9884,7 @@
                 <a:ea typeface="Calibri" pitchFamily="34" charset="-122"/>
                 <a:cs typeface="Calibri" pitchFamily="34" charset="-120"/>
               </a:rPr>
-              <a:t>~700 ms — regardless of telemetry mode</a:t>
+              <a:t>~700 ms (~18%) regardless of telemetry</a:t>
             </a:r>
             <a:endParaRPr lang="en-US" sz="1300" dirty="0"/>
           </a:p>
@@ -9727,6 +9979,723 @@
 <file path=ppt/slides/slide23.xml><?xml version="1.0" encoding="utf-8"?>
 <p:sld xmlns:a="http://schemas.openxmlformats.org/drawingml/2006/main" xmlns:r="http://schemas.openxmlformats.org/officeDocument/2006/relationships" xmlns:p="http://schemas.openxmlformats.org/presentationml/2006/main">
   <p:cSld name="Slide 23">
+    <p:bg>
+      <p:bgPr>
+        <a:solidFill>
+          <a:srgbClr val="FFFFFF"/>
+        </a:solidFill>
+      </p:bgPr>
+    </p:bg>
+    <p:spTree>
+      <p:nvGrpSpPr>
+        <p:cNvPr id="1" name=""/>
+        <p:cNvGrpSpPr/>
+        <p:nvPr/>
+      </p:nvGrpSpPr>
+      <p:grpSpPr>
+        <a:xfrm>
+          <a:off x="0" y="0"/>
+          <a:ext cx="0" cy="0"/>
+          <a:chOff x="0" y="0"/>
+          <a:chExt cx="0" cy="0"/>
+        </a:xfrm>
+      </p:grpSpPr>
+      <p:sp>
+        <p:nvSpPr>
+          <p:cNvPr id="2" name="Text 0"/>
+          <p:cNvSpPr/>
+          <p:nvPr/>
+        </p:nvSpPr>
+        <p:spPr>
+          <a:xfrm>
+            <a:off x="457200" y="365760"/>
+            <a:ext cx="8229600" cy="548640"/>
+          </a:xfrm>
+          <a:prstGeom prst="rect">
+            <a:avLst/>
+          </a:prstGeom>
+          <a:noFill/>
+          <a:ln/>
+        </p:spPr>
+        <p:txBody>
+          <a:bodyPr wrap="square" lIns="0" tIns="0" rIns="0" bIns="0" rtlCol="0" anchor="ctr"/>
+          <a:lstStyle/>
+          <a:p>
+            <a:pPr indent="0" marL="0">
+              <a:buNone/>
+            </a:pPr>
+            <a:r>
+              <a:rPr lang="en-US" sz="2800" b="1" dirty="0">
+                <a:solidFill>
+                  <a:srgbClr val="0F172A"/>
+                </a:solidFill>
+                <a:latin typeface="Calibri" pitchFamily="34" charset="0"/>
+                <a:ea typeface="Calibri" pitchFamily="34" charset="-122"/>
+                <a:cs typeface="Calibri" pitchFamily="34" charset="-120"/>
+              </a:rPr>
+              <a:t>Same JDK. Same Leyden. Different Framework.</a:t>
+            </a:r>
+            <a:endParaRPr lang="en-US" sz="2800" dirty="0"/>
+          </a:p>
+        </p:txBody>
+      </p:sp>
+      <p:sp>
+        <p:nvSpPr>
+          <p:cNvPr id="3" name="Text 1"/>
+          <p:cNvSpPr/>
+          <p:nvPr/>
+        </p:nvSpPr>
+        <p:spPr>
+          <a:xfrm>
+            <a:off x="457200" y="914400"/>
+            <a:ext cx="8229600" cy="320040"/>
+          </a:xfrm>
+          <a:prstGeom prst="rect">
+            <a:avLst/>
+          </a:prstGeom>
+          <a:noFill/>
+          <a:ln/>
+        </p:spPr>
+        <p:txBody>
+          <a:bodyPr wrap="square" lIns="0" tIns="0" rIns="0" bIns="0" rtlCol="0" anchor="ctr"/>
+          <a:lstStyle/>
+          <a:p>
+            <a:pPr indent="0" marL="0">
+              <a:buNone/>
+            </a:pPr>
+            <a:r>
+              <a:rPr lang="en-US" sz="1300" i="1" dirty="0">
+                <a:solidFill>
+                  <a:srgbClr val="64748B"/>
+                </a:solidFill>
+                <a:latin typeface="Calibri" pitchFamily="34" charset="0"/>
+                <a:ea typeface="Calibri" pitchFamily="34" charset="-122"/>
+                <a:cs typeface="Calibri" pitchFamily="34" charset="-120"/>
+              </a:rPr>
+              <a:t>No-telemetry baseline — apples-to-apples cold start</a:t>
+            </a:r>
+            <a:endParaRPr lang="en-US" sz="1300" dirty="0"/>
+          </a:p>
+        </p:txBody>
+      </p:sp>
+      <p:sp>
+        <p:nvSpPr>
+          <p:cNvPr id="4" name="Shape 2"/>
+          <p:cNvSpPr/>
+          <p:nvPr/>
+        </p:nvSpPr>
+        <p:spPr>
+          <a:xfrm>
+            <a:off x="457200" y="1463040"/>
+            <a:ext cx="4023360" cy="457200"/>
+          </a:xfrm>
+          <a:prstGeom prst="rect">
+            <a:avLst/>
+          </a:prstGeom>
+          <a:solidFill>
+            <a:srgbClr val="DC2626"/>
+          </a:solidFill>
+          <a:ln/>
+        </p:spPr>
+      </p:sp>
+      <p:sp>
+        <p:nvSpPr>
+          <p:cNvPr id="5" name="Text 3"/>
+          <p:cNvSpPr/>
+          <p:nvPr/>
+        </p:nvSpPr>
+        <p:spPr>
+          <a:xfrm>
+            <a:off x="640080" y="1508760"/>
+            <a:ext cx="3657600" cy="365760"/>
+          </a:xfrm>
+          <a:prstGeom prst="rect">
+            <a:avLst/>
+          </a:prstGeom>
+          <a:noFill/>
+          <a:ln/>
+        </p:spPr>
+        <p:txBody>
+          <a:bodyPr wrap="square" lIns="0" tIns="0" rIns="0" bIns="0" rtlCol="0" anchor="ctr"/>
+          <a:lstStyle/>
+          <a:p>
+            <a:pPr indent="0" marL="0">
+              <a:buNone/>
+            </a:pPr>
+            <a:r>
+              <a:rPr lang="en-US" sz="1800" b="1" dirty="0">
+                <a:solidFill>
+                  <a:srgbClr val="FFFFFF"/>
+                </a:solidFill>
+                <a:latin typeface="Calibri" pitchFamily="34" charset="0"/>
+                <a:ea typeface="Calibri" pitchFamily="34" charset="-122"/>
+                <a:cs typeface="Calibri" pitchFamily="34" charset="-120"/>
+              </a:rPr>
+              <a:t>Spring Boot 4</a:t>
+            </a:r>
+            <a:endParaRPr lang="en-US" sz="1800" dirty="0"/>
+          </a:p>
+        </p:txBody>
+      </p:sp>
+      <p:sp>
+        <p:nvSpPr>
+          <p:cNvPr id="6" name="Shape 4"/>
+          <p:cNvSpPr/>
+          <p:nvPr/>
+        </p:nvSpPr>
+        <p:spPr>
+          <a:xfrm>
+            <a:off x="457200" y="1920240"/>
+            <a:ext cx="4023360" cy="1737360"/>
+          </a:xfrm>
+          <a:prstGeom prst="rect">
+            <a:avLst/>
+          </a:prstGeom>
+          <a:solidFill>
+            <a:srgbClr val="F8FAFC"/>
+          </a:solidFill>
+          <a:ln/>
+        </p:spPr>
+      </p:sp>
+      <p:sp>
+        <p:nvSpPr>
+          <p:cNvPr id="7" name="Text 5"/>
+          <p:cNvSpPr/>
+          <p:nvPr/>
+        </p:nvSpPr>
+        <p:spPr>
+          <a:xfrm>
+            <a:off x="640080" y="2057400"/>
+            <a:ext cx="3657600" cy="320040"/>
+          </a:xfrm>
+          <a:prstGeom prst="rect">
+            <a:avLst/>
+          </a:prstGeom>
+          <a:noFill/>
+          <a:ln/>
+        </p:spPr>
+        <p:txBody>
+          <a:bodyPr wrap="square" lIns="0" tIns="0" rIns="0" bIns="0" rtlCol="0" anchor="ctr"/>
+          <a:lstStyle/>
+          <a:p>
+            <a:pPr indent="0" marL="0">
+              <a:buNone/>
+            </a:pPr>
+            <a:r>
+              <a:rPr lang="en-US" sz="1300" dirty="0">
+                <a:solidFill>
+                  <a:srgbClr val="64748B"/>
+                </a:solidFill>
+                <a:latin typeface="Calibri" pitchFamily="34" charset="0"/>
+                <a:ea typeface="Calibri" pitchFamily="34" charset="-122"/>
+                <a:cs typeface="Calibri" pitchFamily="34" charset="-120"/>
+              </a:rPr>
+              <a:t>Classic</a:t>
+            </a:r>
+            <a:endParaRPr lang="en-US" sz="1300" dirty="0"/>
+          </a:p>
+        </p:txBody>
+      </p:sp>
+      <p:sp>
+        <p:nvSpPr>
+          <p:cNvPr id="8" name="Text 6"/>
+          <p:cNvSpPr/>
+          <p:nvPr/>
+        </p:nvSpPr>
+        <p:spPr>
+          <a:xfrm>
+            <a:off x="640080" y="2377440"/>
+            <a:ext cx="3657600" cy="457200"/>
+          </a:xfrm>
+          <a:prstGeom prst="rect">
+            <a:avLst/>
+          </a:prstGeom>
+          <a:noFill/>
+          <a:ln/>
+        </p:spPr>
+        <p:txBody>
+          <a:bodyPr wrap="square" lIns="0" tIns="0" rIns="0" bIns="0" rtlCol="0" anchor="ctr"/>
+          <a:lstStyle/>
+          <a:p>
+            <a:pPr indent="0" marL="0">
+              <a:buNone/>
+            </a:pPr>
+            <a:r>
+              <a:rPr lang="en-US" sz="2800" b="1" dirty="0">
+                <a:solidFill>
+                  <a:srgbClr val="0F172A"/>
+                </a:solidFill>
+                <a:latin typeface="Consolas" pitchFamily="34" charset="0"/>
+                <a:ea typeface="Consolas" pitchFamily="34" charset="-122"/>
+                <a:cs typeface="Consolas" pitchFamily="34" charset="-120"/>
+              </a:rPr>
+              <a:t>3954 ms</a:t>
+            </a:r>
+            <a:endParaRPr lang="en-US" sz="2800" dirty="0"/>
+          </a:p>
+        </p:txBody>
+      </p:sp>
+      <p:sp>
+        <p:nvSpPr>
+          <p:cNvPr id="9" name="Text 7"/>
+          <p:cNvSpPr/>
+          <p:nvPr/>
+        </p:nvSpPr>
+        <p:spPr>
+          <a:xfrm>
+            <a:off x="640080" y="2880360"/>
+            <a:ext cx="3657600" cy="320040"/>
+          </a:xfrm>
+          <a:prstGeom prst="rect">
+            <a:avLst/>
+          </a:prstGeom>
+          <a:noFill/>
+          <a:ln/>
+        </p:spPr>
+        <p:txBody>
+          <a:bodyPr wrap="square" lIns="0" tIns="0" rIns="0" bIns="0" rtlCol="0" anchor="ctr"/>
+          <a:lstStyle/>
+          <a:p>
+            <a:pPr indent="0" marL="0">
+              <a:buNone/>
+            </a:pPr>
+            <a:r>
+              <a:rPr lang="en-US" sz="1300" dirty="0">
+                <a:solidFill>
+                  <a:srgbClr val="64748B"/>
+                </a:solidFill>
+                <a:latin typeface="Calibri" pitchFamily="34" charset="0"/>
+                <a:ea typeface="Calibri" pitchFamily="34" charset="-122"/>
+                <a:cs typeface="Calibri" pitchFamily="34" charset="-120"/>
+              </a:rPr>
+              <a:t>+ AOT cache</a:t>
+            </a:r>
+            <a:endParaRPr lang="en-US" sz="1300" dirty="0"/>
+          </a:p>
+        </p:txBody>
+      </p:sp>
+      <p:sp>
+        <p:nvSpPr>
+          <p:cNvPr id="10" name="Text 8"/>
+          <p:cNvSpPr/>
+          <p:nvPr/>
+        </p:nvSpPr>
+        <p:spPr>
+          <a:xfrm>
+            <a:off x="640080" y="3200400"/>
+            <a:ext cx="3657600" cy="457200"/>
+          </a:xfrm>
+          <a:prstGeom prst="rect">
+            <a:avLst/>
+          </a:prstGeom>
+          <a:noFill/>
+          <a:ln/>
+        </p:spPr>
+        <p:txBody>
+          <a:bodyPr wrap="square" lIns="0" tIns="0" rIns="0" bIns="0" rtlCol="0" anchor="ctr"/>
+          <a:lstStyle/>
+          <a:p>
+            <a:pPr indent="0" marL="0">
+              <a:buNone/>
+            </a:pPr>
+            <a:r>
+              <a:rPr lang="en-US" sz="2800" b="1" dirty="0">
+                <a:solidFill>
+                  <a:srgbClr val="0D9488"/>
+                </a:solidFill>
+                <a:latin typeface="Consolas" pitchFamily="34" charset="0"/>
+                <a:ea typeface="Consolas" pitchFamily="34" charset="-122"/>
+                <a:cs typeface="Consolas" pitchFamily="34" charset="-120"/>
+              </a:rPr>
+              <a:t>3252 ms</a:t>
+            </a:r>
+            <a:endParaRPr lang="en-US" sz="2800" dirty="0"/>
+          </a:p>
+        </p:txBody>
+      </p:sp>
+      <p:sp>
+        <p:nvSpPr>
+          <p:cNvPr id="11" name="Shape 9"/>
+          <p:cNvSpPr/>
+          <p:nvPr/>
+        </p:nvSpPr>
+        <p:spPr>
+          <a:xfrm>
+            <a:off x="4663440" y="1463040"/>
+            <a:ext cx="4023360" cy="457200"/>
+          </a:xfrm>
+          <a:prstGeom prst="rect">
+            <a:avLst/>
+          </a:prstGeom>
+          <a:solidFill>
+            <a:srgbClr val="4695EB"/>
+          </a:solidFill>
+          <a:ln/>
+        </p:spPr>
+      </p:sp>
+      <p:sp>
+        <p:nvSpPr>
+          <p:cNvPr id="12" name="Text 10"/>
+          <p:cNvSpPr/>
+          <p:nvPr/>
+        </p:nvSpPr>
+        <p:spPr>
+          <a:xfrm>
+            <a:off x="4846320" y="1508760"/>
+            <a:ext cx="3657600" cy="365760"/>
+          </a:xfrm>
+          <a:prstGeom prst="rect">
+            <a:avLst/>
+          </a:prstGeom>
+          <a:noFill/>
+          <a:ln/>
+        </p:spPr>
+        <p:txBody>
+          <a:bodyPr wrap="square" lIns="0" tIns="0" rIns="0" bIns="0" rtlCol="0" anchor="ctr"/>
+          <a:lstStyle/>
+          <a:p>
+            <a:pPr indent="0" marL="0">
+              <a:buNone/>
+            </a:pPr>
+            <a:r>
+              <a:rPr lang="en-US" sz="1800" b="1" dirty="0">
+                <a:solidFill>
+                  <a:srgbClr val="FFFFFF"/>
+                </a:solidFill>
+                <a:latin typeface="Calibri" pitchFamily="34" charset="0"/>
+                <a:ea typeface="Calibri" pitchFamily="34" charset="-122"/>
+                <a:cs typeface="Calibri" pitchFamily="34" charset="-120"/>
+              </a:rPr>
+              <a:t>Quarkus 3.33</a:t>
+            </a:r>
+            <a:endParaRPr lang="en-US" sz="1800" dirty="0"/>
+          </a:p>
+        </p:txBody>
+      </p:sp>
+      <p:sp>
+        <p:nvSpPr>
+          <p:cNvPr id="13" name="Shape 11"/>
+          <p:cNvSpPr/>
+          <p:nvPr/>
+        </p:nvSpPr>
+        <p:spPr>
+          <a:xfrm>
+            <a:off x="4663440" y="1920240"/>
+            <a:ext cx="4023360" cy="1737360"/>
+          </a:xfrm>
+          <a:prstGeom prst="rect">
+            <a:avLst/>
+          </a:prstGeom>
+          <a:solidFill>
+            <a:srgbClr val="F8FAFC"/>
+          </a:solidFill>
+          <a:ln/>
+        </p:spPr>
+      </p:sp>
+      <p:sp>
+        <p:nvSpPr>
+          <p:cNvPr id="14" name="Text 12"/>
+          <p:cNvSpPr/>
+          <p:nvPr/>
+        </p:nvSpPr>
+        <p:spPr>
+          <a:xfrm>
+            <a:off x="4846320" y="2057400"/>
+            <a:ext cx="3657600" cy="320040"/>
+          </a:xfrm>
+          <a:prstGeom prst="rect">
+            <a:avLst/>
+          </a:prstGeom>
+          <a:noFill/>
+          <a:ln/>
+        </p:spPr>
+        <p:txBody>
+          <a:bodyPr wrap="square" lIns="0" tIns="0" rIns="0" bIns="0" rtlCol="0" anchor="ctr"/>
+          <a:lstStyle/>
+          <a:p>
+            <a:pPr indent="0" marL="0">
+              <a:buNone/>
+            </a:pPr>
+            <a:r>
+              <a:rPr lang="en-US" sz="1300" dirty="0">
+                <a:solidFill>
+                  <a:srgbClr val="64748B"/>
+                </a:solidFill>
+                <a:latin typeface="Calibri" pitchFamily="34" charset="0"/>
+                <a:ea typeface="Calibri" pitchFamily="34" charset="-122"/>
+                <a:cs typeface="Calibri" pitchFamily="34" charset="-120"/>
+              </a:rPr>
+              <a:t>Classic</a:t>
+            </a:r>
+            <a:endParaRPr lang="en-US" sz="1300" dirty="0"/>
+          </a:p>
+        </p:txBody>
+      </p:sp>
+      <p:sp>
+        <p:nvSpPr>
+          <p:cNvPr id="15" name="Text 13"/>
+          <p:cNvSpPr/>
+          <p:nvPr/>
+        </p:nvSpPr>
+        <p:spPr>
+          <a:xfrm>
+            <a:off x="4846320" y="2377440"/>
+            <a:ext cx="3657600" cy="457200"/>
+          </a:xfrm>
+          <a:prstGeom prst="rect">
+            <a:avLst/>
+          </a:prstGeom>
+          <a:noFill/>
+          <a:ln/>
+        </p:spPr>
+        <p:txBody>
+          <a:bodyPr wrap="square" lIns="0" tIns="0" rIns="0" bIns="0" rtlCol="0" anchor="ctr"/>
+          <a:lstStyle/>
+          <a:p>
+            <a:pPr indent="0" marL="0">
+              <a:buNone/>
+            </a:pPr>
+            <a:r>
+              <a:rPr lang="en-US" sz="2800" b="1" dirty="0">
+                <a:solidFill>
+                  <a:srgbClr val="0F172A"/>
+                </a:solidFill>
+                <a:latin typeface="Consolas" pitchFamily="34" charset="0"/>
+                <a:ea typeface="Consolas" pitchFamily="34" charset="-122"/>
+                <a:cs typeface="Consolas" pitchFamily="34" charset="-120"/>
+              </a:rPr>
+              <a:t>787 ms</a:t>
+            </a:r>
+            <a:endParaRPr lang="en-US" sz="2800" dirty="0"/>
+          </a:p>
+        </p:txBody>
+      </p:sp>
+      <p:sp>
+        <p:nvSpPr>
+          <p:cNvPr id="16" name="Text 14"/>
+          <p:cNvSpPr/>
+          <p:nvPr/>
+        </p:nvSpPr>
+        <p:spPr>
+          <a:xfrm>
+            <a:off x="4846320" y="2880360"/>
+            <a:ext cx="3657600" cy="320040"/>
+          </a:xfrm>
+          <a:prstGeom prst="rect">
+            <a:avLst/>
+          </a:prstGeom>
+          <a:noFill/>
+          <a:ln/>
+        </p:spPr>
+        <p:txBody>
+          <a:bodyPr wrap="square" lIns="0" tIns="0" rIns="0" bIns="0" rtlCol="0" anchor="ctr"/>
+          <a:lstStyle/>
+          <a:p>
+            <a:pPr indent="0" marL="0">
+              <a:buNone/>
+            </a:pPr>
+            <a:r>
+              <a:rPr lang="en-US" sz="1300" dirty="0">
+                <a:solidFill>
+                  <a:srgbClr val="64748B"/>
+                </a:solidFill>
+                <a:latin typeface="Calibri" pitchFamily="34" charset="0"/>
+                <a:ea typeface="Calibri" pitchFamily="34" charset="-122"/>
+                <a:cs typeface="Calibri" pitchFamily="34" charset="-120"/>
+              </a:rPr>
+              <a:t>+ Leyden AOT</a:t>
+            </a:r>
+            <a:endParaRPr lang="en-US" sz="1300" dirty="0"/>
+          </a:p>
+        </p:txBody>
+      </p:sp>
+      <p:sp>
+        <p:nvSpPr>
+          <p:cNvPr id="17" name="Text 15"/>
+          <p:cNvSpPr/>
+          <p:nvPr/>
+        </p:nvSpPr>
+        <p:spPr>
+          <a:xfrm>
+            <a:off x="4846320" y="3200400"/>
+            <a:ext cx="3657600" cy="457200"/>
+          </a:xfrm>
+          <a:prstGeom prst="rect">
+            <a:avLst/>
+          </a:prstGeom>
+          <a:noFill/>
+          <a:ln/>
+        </p:spPr>
+        <p:txBody>
+          <a:bodyPr wrap="square" lIns="0" tIns="0" rIns="0" bIns="0" rtlCol="0" anchor="ctr"/>
+          <a:lstStyle/>
+          <a:p>
+            <a:pPr indent="0" marL="0">
+              <a:buNone/>
+            </a:pPr>
+            <a:r>
+              <a:rPr lang="en-US" sz="2800" b="1" dirty="0">
+                <a:solidFill>
+                  <a:srgbClr val="4695EB"/>
+                </a:solidFill>
+                <a:latin typeface="Consolas" pitchFamily="34" charset="0"/>
+                <a:ea typeface="Consolas" pitchFamily="34" charset="-122"/>
+                <a:cs typeface="Consolas" pitchFamily="34" charset="-120"/>
+              </a:rPr>
+              <a:t>181 ms</a:t>
+            </a:r>
+            <a:endParaRPr lang="en-US" sz="2800" dirty="0"/>
+          </a:p>
+        </p:txBody>
+      </p:sp>
+      <p:sp>
+        <p:nvSpPr>
+          <p:cNvPr id="18" name="Shape 16"/>
+          <p:cNvSpPr/>
+          <p:nvPr/>
+        </p:nvSpPr>
+        <p:spPr>
+          <a:xfrm>
+            <a:off x="457200" y="3840480"/>
+            <a:ext cx="8229600" cy="640080"/>
+          </a:xfrm>
+          <a:prstGeom prst="rect">
+            <a:avLst/>
+          </a:prstGeom>
+          <a:solidFill>
+            <a:srgbClr val="0F172A"/>
+          </a:solidFill>
+          <a:ln/>
+        </p:spPr>
+      </p:sp>
+      <p:sp>
+        <p:nvSpPr>
+          <p:cNvPr id="19" name="Text 17"/>
+          <p:cNvSpPr/>
+          <p:nvPr/>
+        </p:nvSpPr>
+        <p:spPr>
+          <a:xfrm>
+            <a:off x="457200" y="3840480"/>
+            <a:ext cx="8229600" cy="640080"/>
+          </a:xfrm>
+          <a:prstGeom prst="rect">
+            <a:avLst/>
+          </a:prstGeom>
+          <a:noFill/>
+          <a:ln/>
+        </p:spPr>
+        <p:txBody>
+          <a:bodyPr wrap="square" lIns="0" tIns="0" rIns="0" bIns="0" rtlCol="0" anchor="ctr"/>
+          <a:lstStyle/>
+          <a:p>
+            <a:pPr algn="ctr" indent="0" marL="0">
+              <a:buNone/>
+            </a:pPr>
+            <a:r>
+              <a:rPr lang="en-US" sz="1800" b="1" dirty="0">
+                <a:solidFill>
+                  <a:srgbClr val="14B8A6"/>
+                </a:solidFill>
+                <a:latin typeface="Calibri" pitchFamily="34" charset="0"/>
+                <a:ea typeface="Calibri" pitchFamily="34" charset="-122"/>
+                <a:cs typeface="Calibri" pitchFamily="34" charset="-120"/>
+              </a:rPr>
+              <a:t>Spring Boot saves ~18% with AOT.   Quarkus saves ~77%.   Same flag. Same JDK.</a:t>
+            </a:r>
+            <a:endParaRPr lang="en-US" sz="1800" dirty="0"/>
+          </a:p>
+        </p:txBody>
+      </p:sp>
+      <p:sp>
+        <p:nvSpPr>
+          <p:cNvPr id="20" name="Text 18"/>
+          <p:cNvSpPr/>
+          <p:nvPr/>
+        </p:nvSpPr>
+        <p:spPr>
+          <a:xfrm>
+            <a:off x="457200" y="4754880"/>
+            <a:ext cx="5486400" cy="274320"/>
+          </a:xfrm>
+          <a:prstGeom prst="rect">
+            <a:avLst/>
+          </a:prstGeom>
+          <a:noFill/>
+          <a:ln/>
+        </p:spPr>
+        <p:txBody>
+          <a:bodyPr wrap="square" lIns="0" tIns="0" rIns="0" bIns="0" rtlCol="0" anchor="ctr"/>
+          <a:lstStyle/>
+          <a:p>
+            <a:pPr indent="0" marL="0">
+              <a:buNone/>
+            </a:pPr>
+            <a:r>
+              <a:rPr lang="en-US" sz="900" i="1" dirty="0">
+                <a:solidFill>
+                  <a:srgbClr val="64748B"/>
+                </a:solidFill>
+                <a:latin typeface="Calibri" pitchFamily="34" charset="0"/>
+                <a:ea typeface="Calibri" pitchFamily="34" charset="-122"/>
+                <a:cs typeface="Calibri" pitchFamily="34" charset="-120"/>
+              </a:rPr>
+              <a:t>Three Signals, One Story</a:t>
+            </a:r>
+            <a:endParaRPr lang="en-US" sz="900" dirty="0"/>
+          </a:p>
+        </p:txBody>
+      </p:sp>
+      <p:sp>
+        <p:nvSpPr>
+          <p:cNvPr id="21" name="Text 19"/>
+          <p:cNvSpPr/>
+          <p:nvPr/>
+        </p:nvSpPr>
+        <p:spPr>
+          <a:xfrm>
+            <a:off x="8229600" y="4754880"/>
+            <a:ext cx="457200" cy="274320"/>
+          </a:xfrm>
+          <a:prstGeom prst="rect">
+            <a:avLst/>
+          </a:prstGeom>
+          <a:noFill/>
+          <a:ln/>
+        </p:spPr>
+        <p:txBody>
+          <a:bodyPr wrap="square" lIns="0" tIns="0" rIns="0" bIns="0" rtlCol="0" anchor="ctr"/>
+          <a:lstStyle/>
+          <a:p>
+            <a:pPr algn="r" indent="0" marL="0">
+              <a:buNone/>
+            </a:pPr>
+            <a:r>
+              <a:rPr lang="en-US" sz="900" dirty="0">
+                <a:solidFill>
+                  <a:srgbClr val="64748B"/>
+                </a:solidFill>
+                <a:latin typeface="Calibri" pitchFamily="34" charset="0"/>
+                <a:ea typeface="Calibri" pitchFamily="34" charset="-122"/>
+                <a:cs typeface="Calibri" pitchFamily="34" charset="-120"/>
+              </a:rPr>
+              <a:t>23</a:t>
+            </a:r>
+            <a:endParaRPr lang="en-US" sz="900" dirty="0"/>
+          </a:p>
+        </p:txBody>
+      </p:sp>
+    </p:spTree>
+  </p:cSld>
+  <p:clrMapOvr>
+    <a:masterClrMapping/>
+  </p:clrMapOvr>
+</p:sld>
+</file>
+
+<file path=ppt/slides/slide24.xml><?xml version="1.0" encoding="utf-8"?>
+<p:sld xmlns:a="http://schemas.openxmlformats.org/drawingml/2006/main" xmlns:r="http://schemas.openxmlformats.org/officeDocument/2006/relationships" xmlns:p="http://schemas.openxmlformats.org/presentationml/2006/main">
+  <p:cSld name="Slide 24">
     <p:bg>
       <p:bgPr>
         <a:solidFill>
@@ -9882,7 +10851,7 @@
                 <a:ea typeface="Calibri" pitchFamily="34" charset="-122"/>
                 <a:cs typeface="Calibri" pitchFamily="34" charset="-120"/>
               </a:rPr>
-              <a:t>3.5s is your entire startup budget. Use the SDK starter.</a:t>
+              <a:t>750ms is your entire startup budget. Use the SDK starter.</a:t>
             </a:r>
             <a:endParaRPr lang="en-US" sz="1800" dirty="0"/>
           </a:p>
@@ -9924,566 +10893,6 @@
               <a:t>Match your telemetry to your workload's startup sensitivity.</a:t>
             </a:r>
             <a:endParaRPr lang="en-US" sz="1400" dirty="0"/>
-          </a:p>
-        </p:txBody>
-      </p:sp>
-    </p:spTree>
-  </p:cSld>
-  <p:clrMapOvr>
-    <a:masterClrMapping/>
-  </p:clrMapOvr>
-</p:sld>
-</file>
-
-<file path=ppt/slides/slide24.xml><?xml version="1.0" encoding="utf-8"?>
-<p:sld xmlns:a="http://schemas.openxmlformats.org/drawingml/2006/main" xmlns:r="http://schemas.openxmlformats.org/officeDocument/2006/relationships" xmlns:p="http://schemas.openxmlformats.org/presentationml/2006/main">
-  <p:cSld name="Slide 24">
-    <p:bg>
-      <p:bgPr>
-        <a:solidFill>
-          <a:srgbClr val="FFFFFF"/>
-        </a:solidFill>
-      </p:bgPr>
-    </p:bg>
-    <p:spTree>
-      <p:nvGrpSpPr>
-        <p:cNvPr id="1" name=""/>
-        <p:cNvGrpSpPr/>
-        <p:nvPr/>
-      </p:nvGrpSpPr>
-      <p:grpSpPr>
-        <a:xfrm>
-          <a:off x="0" y="0"/>
-          <a:ext cx="0" cy="0"/>
-          <a:chOff x="0" y="0"/>
-          <a:chExt cx="0" cy="0"/>
-        </a:xfrm>
-      </p:grpSpPr>
-      <p:sp>
-        <p:nvSpPr>
-          <p:cNvPr id="2" name="Text 0"/>
-          <p:cNvSpPr/>
-          <p:nvPr/>
-        </p:nvSpPr>
-        <p:spPr>
-          <a:xfrm>
-            <a:off x="457200" y="365760"/>
-            <a:ext cx="8229600" cy="548640"/>
-          </a:xfrm>
-          <a:prstGeom prst="rect">
-            <a:avLst/>
-          </a:prstGeom>
-          <a:noFill/>
-          <a:ln/>
-        </p:spPr>
-        <p:txBody>
-          <a:bodyPr wrap="square" lIns="0" tIns="0" rIns="0" bIns="0" rtlCol="0" anchor="ctr"/>
-          <a:lstStyle/>
-          <a:p>
-            <a:pPr indent="0" marL="0">
-              <a:buNone/>
-            </a:pPr>
-            <a:r>
-              <a:rPr lang="en-US" sz="3600" b="1" dirty="0">
-                <a:solidFill>
-                  <a:srgbClr val="0F172A"/>
-                </a:solidFill>
-                <a:latin typeface="Calibri" pitchFamily="34" charset="0"/>
-                <a:ea typeface="Calibri" pitchFamily="34" charset="-122"/>
-                <a:cs typeface="Calibri" pitchFamily="34" charset="-120"/>
-              </a:rPr>
-              <a:t>Three Things to Take Home</a:t>
-            </a:r>
-            <a:endParaRPr lang="en-US" sz="3600" dirty="0"/>
-          </a:p>
-        </p:txBody>
-      </p:sp>
-      <p:sp>
-        <p:nvSpPr>
-          <p:cNvPr id="3" name="Shape 1"/>
-          <p:cNvSpPr/>
-          <p:nvPr/>
-        </p:nvSpPr>
-        <p:spPr>
-          <a:xfrm>
-            <a:off x="457200" y="1325880"/>
-            <a:ext cx="731520" cy="731520"/>
-          </a:xfrm>
-          <a:prstGeom prst="ellipse">
-            <a:avLst/>
-          </a:prstGeom>
-          <a:solidFill>
-            <a:srgbClr val="8B5CF6"/>
-          </a:solidFill>
-          <a:ln/>
-        </p:spPr>
-      </p:sp>
-      <p:sp>
-        <p:nvSpPr>
-          <p:cNvPr id="4" name="Text 2"/>
-          <p:cNvSpPr/>
-          <p:nvPr/>
-        </p:nvSpPr>
-        <p:spPr>
-          <a:xfrm>
-            <a:off x="457200" y="1325880"/>
-            <a:ext cx="731520" cy="731520"/>
-          </a:xfrm>
-          <a:prstGeom prst="rect">
-            <a:avLst/>
-          </a:prstGeom>
-          <a:noFill/>
-          <a:ln/>
-        </p:spPr>
-        <p:txBody>
-          <a:bodyPr wrap="square" lIns="0" tIns="0" rIns="0" bIns="0" rtlCol="0" anchor="ctr"/>
-          <a:lstStyle/>
-          <a:p>
-            <a:pPr algn="ctr" indent="0" marL="0">
-              <a:buNone/>
-            </a:pPr>
-            <a:r>
-              <a:rPr lang="en-US" sz="3200" b="1" dirty="0">
-                <a:solidFill>
-                  <a:srgbClr val="FFFFFF"/>
-                </a:solidFill>
-                <a:latin typeface="Calibri" pitchFamily="34" charset="0"/>
-                <a:ea typeface="Calibri" pitchFamily="34" charset="-122"/>
-                <a:cs typeface="Calibri" pitchFamily="34" charset="-120"/>
-              </a:rPr>
-              <a:t>1</a:t>
-            </a:r>
-            <a:endParaRPr lang="en-US" sz="3200" dirty="0"/>
-          </a:p>
-        </p:txBody>
-      </p:sp>
-      <p:sp>
-        <p:nvSpPr>
-          <p:cNvPr id="5" name="Text 3"/>
-          <p:cNvSpPr/>
-          <p:nvPr/>
-        </p:nvSpPr>
-        <p:spPr>
-          <a:xfrm>
-            <a:off x="1371600" y="1234440"/>
-            <a:ext cx="7040880" cy="411480"/>
-          </a:xfrm>
-          <a:prstGeom prst="rect">
-            <a:avLst/>
-          </a:prstGeom>
-          <a:noFill/>
-          <a:ln/>
-        </p:spPr>
-        <p:txBody>
-          <a:bodyPr wrap="square" lIns="0" tIns="0" rIns="0" bIns="0" rtlCol="0" anchor="ctr"/>
-          <a:lstStyle/>
-          <a:p>
-            <a:pPr indent="0" marL="0">
-              <a:buNone/>
-            </a:pPr>
-            <a:r>
-              <a:rPr lang="en-US" sz="1800" b="1" dirty="0">
-                <a:solidFill>
-                  <a:srgbClr val="0F172A"/>
-                </a:solidFill>
-                <a:latin typeface="Calibri" pitchFamily="34" charset="0"/>
-                <a:ea typeface="Calibri" pitchFamily="34" charset="-122"/>
-                <a:cs typeface="Calibri" pitchFamily="34" charset="-120"/>
-              </a:rPr>
-              <a:t>Correlation is a feature, not a query.</a:t>
-            </a:r>
-            <a:endParaRPr lang="en-US" sz="1800" dirty="0"/>
-          </a:p>
-        </p:txBody>
-      </p:sp>
-      <p:sp>
-        <p:nvSpPr>
-          <p:cNvPr id="6" name="Text 4"/>
-          <p:cNvSpPr/>
-          <p:nvPr/>
-        </p:nvSpPr>
-        <p:spPr>
-          <a:xfrm>
-            <a:off x="1371600" y="1645920"/>
-            <a:ext cx="7040880" cy="594360"/>
-          </a:xfrm>
-          <a:prstGeom prst="rect">
-            <a:avLst/>
-          </a:prstGeom>
-          <a:noFill/>
-          <a:ln/>
-        </p:spPr>
-        <p:txBody>
-          <a:bodyPr wrap="square" lIns="0" tIns="0" rIns="0" bIns="0" rtlCol="0" anchor="ctr"/>
-          <a:lstStyle/>
-          <a:p>
-            <a:pPr indent="0" marL="0">
-              <a:buNone/>
-            </a:pPr>
-            <a:r>
-              <a:rPr lang="en-US" sz="1200" dirty="0">
-                <a:solidFill>
-                  <a:srgbClr val="64748B"/>
-                </a:solidFill>
-                <a:latin typeface="Calibri" pitchFamily="34" charset="0"/>
-                <a:ea typeface="Calibri" pitchFamily="34" charset="-122"/>
-                <a:cs typeface="Calibri" pitchFamily="34" charset="-120"/>
-              </a:rPr>
-              <a:t>Build trace_id propagation into your platform. Across signals, across services, across processes. Without it, every observability question becomes archaeology.</a:t>
-            </a:r>
-            <a:endParaRPr lang="en-US" sz="1200" dirty="0"/>
-          </a:p>
-        </p:txBody>
-      </p:sp>
-      <p:sp>
-        <p:nvSpPr>
-          <p:cNvPr id="7" name="Shape 5"/>
-          <p:cNvSpPr/>
-          <p:nvPr/>
-        </p:nvSpPr>
-        <p:spPr>
-          <a:xfrm>
-            <a:off x="457200" y="2514600"/>
-            <a:ext cx="731520" cy="731520"/>
-          </a:xfrm>
-          <a:prstGeom prst="ellipse">
-            <a:avLst/>
-          </a:prstGeom>
-          <a:solidFill>
-            <a:srgbClr val="F59E0B"/>
-          </a:solidFill>
-          <a:ln/>
-        </p:spPr>
-      </p:sp>
-      <p:sp>
-        <p:nvSpPr>
-          <p:cNvPr id="8" name="Text 6"/>
-          <p:cNvSpPr/>
-          <p:nvPr/>
-        </p:nvSpPr>
-        <p:spPr>
-          <a:xfrm>
-            <a:off x="457200" y="2514600"/>
-            <a:ext cx="731520" cy="731520"/>
-          </a:xfrm>
-          <a:prstGeom prst="rect">
-            <a:avLst/>
-          </a:prstGeom>
-          <a:noFill/>
-          <a:ln/>
-        </p:spPr>
-        <p:txBody>
-          <a:bodyPr wrap="square" lIns="0" tIns="0" rIns="0" bIns="0" rtlCol="0" anchor="ctr"/>
-          <a:lstStyle/>
-          <a:p>
-            <a:pPr algn="ctr" indent="0" marL="0">
-              <a:buNone/>
-            </a:pPr>
-            <a:r>
-              <a:rPr lang="en-US" sz="3200" b="1" dirty="0">
-                <a:solidFill>
-                  <a:srgbClr val="FFFFFF"/>
-                </a:solidFill>
-                <a:latin typeface="Calibri" pitchFamily="34" charset="0"/>
-                <a:ea typeface="Calibri" pitchFamily="34" charset="-122"/>
-                <a:cs typeface="Calibri" pitchFamily="34" charset="-120"/>
-              </a:rPr>
-              <a:t>2</a:t>
-            </a:r>
-            <a:endParaRPr lang="en-US" sz="3200" dirty="0"/>
-          </a:p>
-        </p:txBody>
-      </p:sp>
-      <p:sp>
-        <p:nvSpPr>
-          <p:cNvPr id="9" name="Text 7"/>
-          <p:cNvSpPr/>
-          <p:nvPr/>
-        </p:nvSpPr>
-        <p:spPr>
-          <a:xfrm>
-            <a:off x="1371600" y="2423160"/>
-            <a:ext cx="7040880" cy="411480"/>
-          </a:xfrm>
-          <a:prstGeom prst="rect">
-            <a:avLst/>
-          </a:prstGeom>
-          <a:noFill/>
-          <a:ln/>
-        </p:spPr>
-        <p:txBody>
-          <a:bodyPr wrap="square" lIns="0" tIns="0" rIns="0" bIns="0" rtlCol="0" anchor="ctr"/>
-          <a:lstStyle/>
-          <a:p>
-            <a:pPr indent="0" marL="0">
-              <a:buNone/>
-            </a:pPr>
-            <a:r>
-              <a:rPr lang="en-US" sz="1800" b="1" dirty="0">
-                <a:solidFill>
-                  <a:srgbClr val="0F172A"/>
-                </a:solidFill>
-                <a:latin typeface="Calibri" pitchFamily="34" charset="0"/>
-                <a:ea typeface="Calibri" pitchFamily="34" charset="-122"/>
-                <a:cs typeface="Calibri" pitchFamily="34" charset="-120"/>
-              </a:rPr>
-              <a:t>Cardinality is an ops cost. Budget it.</a:t>
-            </a:r>
-            <a:endParaRPr lang="en-US" sz="1800" dirty="0"/>
-          </a:p>
-        </p:txBody>
-      </p:sp>
-      <p:sp>
-        <p:nvSpPr>
-          <p:cNvPr id="10" name="Text 8"/>
-          <p:cNvSpPr/>
-          <p:nvPr/>
-        </p:nvSpPr>
-        <p:spPr>
-          <a:xfrm>
-            <a:off x="1371600" y="2834640"/>
-            <a:ext cx="7040880" cy="594360"/>
-          </a:xfrm>
-          <a:prstGeom prst="rect">
-            <a:avLst/>
-          </a:prstGeom>
-          <a:noFill/>
-          <a:ln/>
-        </p:spPr>
-        <p:txBody>
-          <a:bodyPr wrap="square" lIns="0" tIns="0" rIns="0" bIns="0" rtlCol="0" anchor="ctr"/>
-          <a:lstStyle/>
-          <a:p>
-            <a:pPr indent="0" marL="0">
-              <a:buNone/>
-            </a:pPr>
-            <a:r>
-              <a:rPr lang="en-US" sz="1200" dirty="0">
-                <a:solidFill>
-                  <a:srgbClr val="64748B"/>
-                </a:solidFill>
-                <a:latin typeface="Calibri" pitchFamily="34" charset="0"/>
-                <a:ea typeface="Calibri" pitchFamily="34" charset="-122"/>
-                <a:cs typeface="Calibri" pitchFamily="34" charset="-120"/>
-              </a:rPr>
-              <a:t>User IDs go in traces. Latency goes in histograms. Continuous values get bucketed. The Collector is where you enforce the budget at the edge — not the TSDB at 3am.</a:t>
-            </a:r>
-            <a:endParaRPr lang="en-US" sz="1200" dirty="0"/>
-          </a:p>
-        </p:txBody>
-      </p:sp>
-      <p:sp>
-        <p:nvSpPr>
-          <p:cNvPr id="11" name="Shape 9"/>
-          <p:cNvSpPr/>
-          <p:nvPr/>
-        </p:nvSpPr>
-        <p:spPr>
-          <a:xfrm>
-            <a:off x="457200" y="3703320"/>
-            <a:ext cx="731520" cy="731520"/>
-          </a:xfrm>
-          <a:prstGeom prst="ellipse">
-            <a:avLst/>
-          </a:prstGeom>
-          <a:solidFill>
-            <a:srgbClr val="DC2626"/>
-          </a:solidFill>
-          <a:ln/>
-        </p:spPr>
-      </p:sp>
-      <p:sp>
-        <p:nvSpPr>
-          <p:cNvPr id="12" name="Text 10"/>
-          <p:cNvSpPr/>
-          <p:nvPr/>
-        </p:nvSpPr>
-        <p:spPr>
-          <a:xfrm>
-            <a:off x="457200" y="3703320"/>
-            <a:ext cx="731520" cy="731520"/>
-          </a:xfrm>
-          <a:prstGeom prst="rect">
-            <a:avLst/>
-          </a:prstGeom>
-          <a:noFill/>
-          <a:ln/>
-        </p:spPr>
-        <p:txBody>
-          <a:bodyPr wrap="square" lIns="0" tIns="0" rIns="0" bIns="0" rtlCol="0" anchor="ctr"/>
-          <a:lstStyle/>
-          <a:p>
-            <a:pPr algn="ctr" indent="0" marL="0">
-              <a:buNone/>
-            </a:pPr>
-            <a:r>
-              <a:rPr lang="en-US" sz="3200" b="1" dirty="0">
-                <a:solidFill>
-                  <a:srgbClr val="FFFFFF"/>
-                </a:solidFill>
-                <a:latin typeface="Calibri" pitchFamily="34" charset="0"/>
-                <a:ea typeface="Calibri" pitchFamily="34" charset="-122"/>
-                <a:cs typeface="Calibri" pitchFamily="34" charset="-120"/>
-              </a:rPr>
-              <a:t>3</a:t>
-            </a:r>
-            <a:endParaRPr lang="en-US" sz="3200" dirty="0"/>
-          </a:p>
-        </p:txBody>
-      </p:sp>
-      <p:sp>
-        <p:nvSpPr>
-          <p:cNvPr id="13" name="Text 11"/>
-          <p:cNvSpPr/>
-          <p:nvPr/>
-        </p:nvSpPr>
-        <p:spPr>
-          <a:xfrm>
-            <a:off x="1371600" y="3611880"/>
-            <a:ext cx="7040880" cy="411480"/>
-          </a:xfrm>
-          <a:prstGeom prst="rect">
-            <a:avLst/>
-          </a:prstGeom>
-          <a:noFill/>
-          <a:ln/>
-        </p:spPr>
-        <p:txBody>
-          <a:bodyPr wrap="square" lIns="0" tIns="0" rIns="0" bIns="0" rtlCol="0" anchor="ctr"/>
-          <a:lstStyle/>
-          <a:p>
-            <a:pPr indent="0" marL="0">
-              <a:buNone/>
-            </a:pPr>
-            <a:r>
-              <a:rPr lang="en-US" sz="1800" b="1" dirty="0">
-                <a:solidFill>
-                  <a:srgbClr val="0F172A"/>
-                </a:solidFill>
-                <a:latin typeface="Calibri" pitchFamily="34" charset="0"/>
-                <a:ea typeface="Calibri" pitchFamily="34" charset="-122"/>
-                <a:cs typeface="Calibri" pitchFamily="34" charset="-120"/>
-              </a:rPr>
-              <a:t>Match telemetry to workload sensitivity.</a:t>
-            </a:r>
-            <a:endParaRPr lang="en-US" sz="1800" dirty="0"/>
-          </a:p>
-        </p:txBody>
-      </p:sp>
-      <p:sp>
-        <p:nvSpPr>
-          <p:cNvPr id="14" name="Text 12"/>
-          <p:cNvSpPr/>
-          <p:nvPr/>
-        </p:nvSpPr>
-        <p:spPr>
-          <a:xfrm>
-            <a:off x="1371600" y="4023360"/>
-            <a:ext cx="7040880" cy="594360"/>
-          </a:xfrm>
-          <a:prstGeom prst="rect">
-            <a:avLst/>
-          </a:prstGeom>
-          <a:noFill/>
-          <a:ln/>
-        </p:spPr>
-        <p:txBody>
-          <a:bodyPr wrap="square" lIns="0" tIns="0" rIns="0" bIns="0" rtlCol="0" anchor="ctr"/>
-          <a:lstStyle/>
-          <a:p>
-            <a:pPr indent="0" marL="0">
-              <a:buNone/>
-            </a:pPr>
-            <a:r>
-              <a:rPr lang="en-US" sz="1200" dirty="0">
-                <a:solidFill>
-                  <a:srgbClr val="64748B"/>
-                </a:solidFill>
-                <a:latin typeface="Calibri" pitchFamily="34" charset="0"/>
-                <a:ea typeface="Calibri" pitchFamily="34" charset="-122"/>
-                <a:cs typeface="Calibri" pitchFamily="34" charset="-120"/>
-              </a:rPr>
-              <a:t>OTel agent for long-running services where the 3.5s tax amortizes. SDK starter for cold-scale and serverless. The two are tools, not opposing camps.</a:t>
-            </a:r>
-            <a:endParaRPr lang="en-US" sz="1200" dirty="0"/>
-          </a:p>
-        </p:txBody>
-      </p:sp>
-      <p:sp>
-        <p:nvSpPr>
-          <p:cNvPr id="15" name="Text 13"/>
-          <p:cNvSpPr/>
-          <p:nvPr/>
-        </p:nvSpPr>
-        <p:spPr>
-          <a:xfrm>
-            <a:off x="457200" y="4754880"/>
-            <a:ext cx="5486400" cy="274320"/>
-          </a:xfrm>
-          <a:prstGeom prst="rect">
-            <a:avLst/>
-          </a:prstGeom>
-          <a:noFill/>
-          <a:ln/>
-        </p:spPr>
-        <p:txBody>
-          <a:bodyPr wrap="square" lIns="0" tIns="0" rIns="0" bIns="0" rtlCol="0" anchor="ctr"/>
-          <a:lstStyle/>
-          <a:p>
-            <a:pPr indent="0" marL="0">
-              <a:buNone/>
-            </a:pPr>
-            <a:r>
-              <a:rPr lang="en-US" sz="900" i="1" dirty="0">
-                <a:solidFill>
-                  <a:srgbClr val="64748B"/>
-                </a:solidFill>
-                <a:latin typeface="Calibri" pitchFamily="34" charset="0"/>
-                <a:ea typeface="Calibri" pitchFamily="34" charset="-122"/>
-                <a:cs typeface="Calibri" pitchFamily="34" charset="-120"/>
-              </a:rPr>
-              <a:t>Three Signals, One Story</a:t>
-            </a:r>
-            <a:endParaRPr lang="en-US" sz="900" dirty="0"/>
-          </a:p>
-        </p:txBody>
-      </p:sp>
-      <p:sp>
-        <p:nvSpPr>
-          <p:cNvPr id="16" name="Text 14"/>
-          <p:cNvSpPr/>
-          <p:nvPr/>
-        </p:nvSpPr>
-        <p:spPr>
-          <a:xfrm>
-            <a:off x="8229600" y="4754880"/>
-            <a:ext cx="457200" cy="274320"/>
-          </a:xfrm>
-          <a:prstGeom prst="rect">
-            <a:avLst/>
-          </a:prstGeom>
-          <a:noFill/>
-          <a:ln/>
-        </p:spPr>
-        <p:txBody>
-          <a:bodyPr wrap="square" lIns="0" tIns="0" rIns="0" bIns="0" rtlCol="0" anchor="ctr"/>
-          <a:lstStyle/>
-          <a:p>
-            <a:pPr algn="r" indent="0" marL="0">
-              <a:buNone/>
-            </a:pPr>
-            <a:r>
-              <a:rPr lang="en-US" sz="900" dirty="0">
-                <a:solidFill>
-                  <a:srgbClr val="64748B"/>
-                </a:solidFill>
-                <a:latin typeface="Calibri" pitchFamily="34" charset="0"/>
-                <a:ea typeface="Calibri" pitchFamily="34" charset="-122"/>
-                <a:cs typeface="Calibri" pitchFamily="34" charset="-120"/>
-              </a:rPr>
-              <a:t>24</a:t>
-            </a:r>
-            <a:endParaRPr lang="en-US" sz="900" dirty="0"/>
           </a:p>
         </p:txBody>
       </p:sp>
@@ -10552,7 +10961,7 @@
                 <a:ea typeface="Calibri" pitchFamily="34" charset="-122"/>
                 <a:cs typeface="Calibri" pitchFamily="34" charset="-120"/>
               </a:rPr>
-              <a:t>Resources &amp; References</a:t>
+              <a:t>Three Things to Take Home</a:t>
             </a:r>
             <a:endParaRPr lang="en-US" sz="3600" dirty="0"/>
           </a:p>
@@ -10560,30 +10969,89 @@
       </p:sp>
       <p:sp>
         <p:nvSpPr>
-          <p:cNvPr id="3" name="Text 1"/>
-          <p:cNvSpPr/>
-          <p:nvPr/>
-        </p:nvSpPr>
-        <p:spPr>
-          <a:xfrm>
-            <a:off x="640080" y="1280160"/>
-            <a:ext cx="3200400" cy="502920"/>
-          </a:xfrm>
-          <a:prstGeom prst="rect">
-            <a:avLst/>
-          </a:prstGeom>
-          <a:noFill/>
-          <a:ln/>
-        </p:spPr>
-        <p:txBody>
-          <a:bodyPr wrap="square" lIns="0" tIns="0" rIns="0" bIns="0" rtlCol="0" anchor="ctr"/>
-          <a:lstStyle/>
-          <a:p>
-            <a:pPr indent="0" marL="0">
-              <a:buNone/>
-            </a:pPr>
-            <a:r>
-              <a:rPr lang="en-US" sz="1500" b="1" dirty="0">
+          <p:cNvPr id="3" name="Shape 1"/>
+          <p:cNvSpPr/>
+          <p:nvPr/>
+        </p:nvSpPr>
+        <p:spPr>
+          <a:xfrm>
+            <a:off x="457200" y="1325880"/>
+            <a:ext cx="731520" cy="731520"/>
+          </a:xfrm>
+          <a:prstGeom prst="ellipse">
+            <a:avLst/>
+          </a:prstGeom>
+          <a:solidFill>
+            <a:srgbClr val="8B5CF6"/>
+          </a:solidFill>
+          <a:ln/>
+        </p:spPr>
+      </p:sp>
+      <p:sp>
+        <p:nvSpPr>
+          <p:cNvPr id="4" name="Text 2"/>
+          <p:cNvSpPr/>
+          <p:nvPr/>
+        </p:nvSpPr>
+        <p:spPr>
+          <a:xfrm>
+            <a:off x="457200" y="1325880"/>
+            <a:ext cx="731520" cy="731520"/>
+          </a:xfrm>
+          <a:prstGeom prst="rect">
+            <a:avLst/>
+          </a:prstGeom>
+          <a:noFill/>
+          <a:ln/>
+        </p:spPr>
+        <p:txBody>
+          <a:bodyPr wrap="square" lIns="0" tIns="0" rIns="0" bIns="0" rtlCol="0" anchor="ctr"/>
+          <a:lstStyle/>
+          <a:p>
+            <a:pPr algn="ctr" indent="0" marL="0">
+              <a:buNone/>
+            </a:pPr>
+            <a:r>
+              <a:rPr lang="en-US" sz="3200" b="1" dirty="0">
+                <a:solidFill>
+                  <a:srgbClr val="FFFFFF"/>
+                </a:solidFill>
+                <a:latin typeface="Calibri" pitchFamily="34" charset="0"/>
+                <a:ea typeface="Calibri" pitchFamily="34" charset="-122"/>
+                <a:cs typeface="Calibri" pitchFamily="34" charset="-120"/>
+              </a:rPr>
+              <a:t>1</a:t>
+            </a:r>
+            <a:endParaRPr lang="en-US" sz="3200" dirty="0"/>
+          </a:p>
+        </p:txBody>
+      </p:sp>
+      <p:sp>
+        <p:nvSpPr>
+          <p:cNvPr id="5" name="Text 3"/>
+          <p:cNvSpPr/>
+          <p:nvPr/>
+        </p:nvSpPr>
+        <p:spPr>
+          <a:xfrm>
+            <a:off x="1371600" y="1234440"/>
+            <a:ext cx="7040880" cy="411480"/>
+          </a:xfrm>
+          <a:prstGeom prst="rect">
+            <a:avLst/>
+          </a:prstGeom>
+          <a:noFill/>
+          <a:ln/>
+        </p:spPr>
+        <p:txBody>
+          <a:bodyPr wrap="square" lIns="0" tIns="0" rIns="0" bIns="0" rtlCol="0" anchor="ctr"/>
+          <a:lstStyle/>
+          <a:p>
+            <a:pPr indent="0" marL="0">
+              <a:buNone/>
+            </a:pPr>
+            <a:r>
+              <a:rPr lang="en-US" sz="1800" b="1" dirty="0">
                 <a:solidFill>
                   <a:srgbClr val="0F172A"/>
                 </a:solidFill>
@@ -10591,77 +11059,136 @@
                 <a:ea typeface="Calibri" pitchFamily="34" charset="-122"/>
                 <a:cs typeface="Calibri" pitchFamily="34" charset="-120"/>
               </a:rPr>
-              <a:t>This talk's code</a:t>
-            </a:r>
-            <a:endParaRPr lang="en-US" sz="1500" dirty="0"/>
-          </a:p>
-        </p:txBody>
-      </p:sp>
-      <p:sp>
-        <p:nvSpPr>
-          <p:cNvPr id="4" name="Text 2"/>
-          <p:cNvSpPr/>
-          <p:nvPr/>
-        </p:nvSpPr>
-        <p:spPr>
-          <a:xfrm>
-            <a:off x="3931920" y="1280160"/>
-            <a:ext cx="4572000" cy="502920"/>
-          </a:xfrm>
-          <a:prstGeom prst="rect">
-            <a:avLst/>
-          </a:prstGeom>
-          <a:noFill/>
-          <a:ln/>
-        </p:spPr>
-        <p:txBody>
-          <a:bodyPr wrap="square" lIns="0" tIns="0" rIns="0" bIns="0" rtlCol="0" anchor="ctr"/>
-          <a:lstStyle/>
-          <a:p>
-            <a:pPr indent="0" marL="0">
-              <a:buNone/>
-            </a:pPr>
-            <a:r>
-              <a:rPr lang="en-US" sz="1300" dirty="0">
-                <a:solidFill>
-                  <a:srgbClr val="0D9488"/>
-                </a:solidFill>
-                <a:latin typeface="Consolas" pitchFamily="34" charset="0"/>
-                <a:ea typeface="Consolas" pitchFamily="34" charset="-122"/>
-                <a:cs typeface="Consolas" pitchFamily="34" charset="-120"/>
-              </a:rPr>
-              <a:t>github.com/patterncatalyst/otel-observability-demos</a:t>
-            </a:r>
-            <a:endParaRPr lang="en-US" sz="1300" dirty="0"/>
-          </a:p>
-        </p:txBody>
-      </p:sp>
-      <p:sp>
-        <p:nvSpPr>
-          <p:cNvPr id="5" name="Text 3"/>
-          <p:cNvSpPr/>
-          <p:nvPr/>
-        </p:nvSpPr>
-        <p:spPr>
-          <a:xfrm>
-            <a:off x="640080" y="1828800"/>
-            <a:ext cx="3200400" cy="502920"/>
-          </a:xfrm>
-          <a:prstGeom prst="rect">
-            <a:avLst/>
-          </a:prstGeom>
-          <a:noFill/>
-          <a:ln/>
-        </p:spPr>
-        <p:txBody>
-          <a:bodyPr wrap="square" lIns="0" tIns="0" rIns="0" bIns="0" rtlCol="0" anchor="ctr"/>
-          <a:lstStyle/>
-          <a:p>
-            <a:pPr indent="0" marL="0">
-              <a:buNone/>
-            </a:pPr>
-            <a:r>
-              <a:rPr lang="en-US" sz="1500" b="1" dirty="0">
+              <a:t>Correlation is a feature, not a query.</a:t>
+            </a:r>
+            <a:endParaRPr lang="en-US" sz="1800" dirty="0"/>
+          </a:p>
+        </p:txBody>
+      </p:sp>
+      <p:sp>
+        <p:nvSpPr>
+          <p:cNvPr id="6" name="Text 4"/>
+          <p:cNvSpPr/>
+          <p:nvPr/>
+        </p:nvSpPr>
+        <p:spPr>
+          <a:xfrm>
+            <a:off x="1371600" y="1645920"/>
+            <a:ext cx="7040880" cy="594360"/>
+          </a:xfrm>
+          <a:prstGeom prst="rect">
+            <a:avLst/>
+          </a:prstGeom>
+          <a:noFill/>
+          <a:ln/>
+        </p:spPr>
+        <p:txBody>
+          <a:bodyPr wrap="square" lIns="0" tIns="0" rIns="0" bIns="0" rtlCol="0" anchor="ctr"/>
+          <a:lstStyle/>
+          <a:p>
+            <a:pPr indent="0" marL="0">
+              <a:buNone/>
+            </a:pPr>
+            <a:r>
+              <a:rPr lang="en-US" sz="1200" dirty="0">
+                <a:solidFill>
+                  <a:srgbClr val="64748B"/>
+                </a:solidFill>
+                <a:latin typeface="Calibri" pitchFamily="34" charset="0"/>
+                <a:ea typeface="Calibri" pitchFamily="34" charset="-122"/>
+                <a:cs typeface="Calibri" pitchFamily="34" charset="-120"/>
+              </a:rPr>
+              <a:t>Build trace_id propagation into your platform. Across signals, across services, across processes. Without it, every observability question becomes archaeology.</a:t>
+            </a:r>
+            <a:endParaRPr lang="en-US" sz="1200" dirty="0"/>
+          </a:p>
+        </p:txBody>
+      </p:sp>
+      <p:sp>
+        <p:nvSpPr>
+          <p:cNvPr id="7" name="Shape 5"/>
+          <p:cNvSpPr/>
+          <p:nvPr/>
+        </p:nvSpPr>
+        <p:spPr>
+          <a:xfrm>
+            <a:off x="457200" y="2514600"/>
+            <a:ext cx="731520" cy="731520"/>
+          </a:xfrm>
+          <a:prstGeom prst="ellipse">
+            <a:avLst/>
+          </a:prstGeom>
+          <a:solidFill>
+            <a:srgbClr val="F59E0B"/>
+          </a:solidFill>
+          <a:ln/>
+        </p:spPr>
+      </p:sp>
+      <p:sp>
+        <p:nvSpPr>
+          <p:cNvPr id="8" name="Text 6"/>
+          <p:cNvSpPr/>
+          <p:nvPr/>
+        </p:nvSpPr>
+        <p:spPr>
+          <a:xfrm>
+            <a:off x="457200" y="2514600"/>
+            <a:ext cx="731520" cy="731520"/>
+          </a:xfrm>
+          <a:prstGeom prst="rect">
+            <a:avLst/>
+          </a:prstGeom>
+          <a:noFill/>
+          <a:ln/>
+        </p:spPr>
+        <p:txBody>
+          <a:bodyPr wrap="square" lIns="0" tIns="0" rIns="0" bIns="0" rtlCol="0" anchor="ctr"/>
+          <a:lstStyle/>
+          <a:p>
+            <a:pPr algn="ctr" indent="0" marL="0">
+              <a:buNone/>
+            </a:pPr>
+            <a:r>
+              <a:rPr lang="en-US" sz="3200" b="1" dirty="0">
+                <a:solidFill>
+                  <a:srgbClr val="FFFFFF"/>
+                </a:solidFill>
+                <a:latin typeface="Calibri" pitchFamily="34" charset="0"/>
+                <a:ea typeface="Calibri" pitchFamily="34" charset="-122"/>
+                <a:cs typeface="Calibri" pitchFamily="34" charset="-120"/>
+              </a:rPr>
+              <a:t>2</a:t>
+            </a:r>
+            <a:endParaRPr lang="en-US" sz="3200" dirty="0"/>
+          </a:p>
+        </p:txBody>
+      </p:sp>
+      <p:sp>
+        <p:nvSpPr>
+          <p:cNvPr id="9" name="Text 7"/>
+          <p:cNvSpPr/>
+          <p:nvPr/>
+        </p:nvSpPr>
+        <p:spPr>
+          <a:xfrm>
+            <a:off x="1371600" y="2423160"/>
+            <a:ext cx="7040880" cy="411480"/>
+          </a:xfrm>
+          <a:prstGeom prst="rect">
+            <a:avLst/>
+          </a:prstGeom>
+          <a:noFill/>
+          <a:ln/>
+        </p:spPr>
+        <p:txBody>
+          <a:bodyPr wrap="square" lIns="0" tIns="0" rIns="0" bIns="0" rtlCol="0" anchor="ctr"/>
+          <a:lstStyle/>
+          <a:p>
+            <a:pPr indent="0" marL="0">
+              <a:buNone/>
+            </a:pPr>
+            <a:r>
+              <a:rPr lang="en-US" sz="1800" b="1" dirty="0">
                 <a:solidFill>
                   <a:srgbClr val="0F172A"/>
                 </a:solidFill>
@@ -10669,77 +11196,136 @@
                 <a:ea typeface="Calibri" pitchFamily="34" charset="-122"/>
                 <a:cs typeface="Calibri" pitchFamily="34" charset="-120"/>
               </a:rPr>
-              <a:t>OpenTelemetry</a:t>
-            </a:r>
-            <a:endParaRPr lang="en-US" sz="1500" dirty="0"/>
-          </a:p>
-        </p:txBody>
-      </p:sp>
-      <p:sp>
-        <p:nvSpPr>
-          <p:cNvPr id="6" name="Text 4"/>
-          <p:cNvSpPr/>
-          <p:nvPr/>
-        </p:nvSpPr>
-        <p:spPr>
-          <a:xfrm>
-            <a:off x="3931920" y="1828800"/>
-            <a:ext cx="4572000" cy="502920"/>
-          </a:xfrm>
-          <a:prstGeom prst="rect">
-            <a:avLst/>
-          </a:prstGeom>
-          <a:noFill/>
-          <a:ln/>
-        </p:spPr>
-        <p:txBody>
-          <a:bodyPr wrap="square" lIns="0" tIns="0" rIns="0" bIns="0" rtlCol="0" anchor="ctr"/>
-          <a:lstStyle/>
-          <a:p>
-            <a:pPr indent="0" marL="0">
-              <a:buNone/>
-            </a:pPr>
-            <a:r>
-              <a:rPr lang="en-US" sz="1300" dirty="0">
-                <a:solidFill>
-                  <a:srgbClr val="0D9488"/>
-                </a:solidFill>
-                <a:latin typeface="Consolas" pitchFamily="34" charset="0"/>
-                <a:ea typeface="Consolas" pitchFamily="34" charset="-122"/>
-                <a:cs typeface="Consolas" pitchFamily="34" charset="-120"/>
-              </a:rPr>
-              <a:t>opentelemetry.io</a:t>
-            </a:r>
-            <a:endParaRPr lang="en-US" sz="1300" dirty="0"/>
-          </a:p>
-        </p:txBody>
-      </p:sp>
-      <p:sp>
-        <p:nvSpPr>
-          <p:cNvPr id="7" name="Text 5"/>
-          <p:cNvSpPr/>
-          <p:nvPr/>
-        </p:nvSpPr>
-        <p:spPr>
-          <a:xfrm>
-            <a:off x="640080" y="2377440"/>
-            <a:ext cx="3200400" cy="502920"/>
-          </a:xfrm>
-          <a:prstGeom prst="rect">
-            <a:avLst/>
-          </a:prstGeom>
-          <a:noFill/>
-          <a:ln/>
-        </p:spPr>
-        <p:txBody>
-          <a:bodyPr wrap="square" lIns="0" tIns="0" rIns="0" bIns="0" rtlCol="0" anchor="ctr"/>
-          <a:lstStyle/>
-          <a:p>
-            <a:pPr indent="0" marL="0">
-              <a:buNone/>
-            </a:pPr>
-            <a:r>
-              <a:rPr lang="en-US" sz="1500" b="1" dirty="0">
+              <a:t>Cardinality is an ops cost. Budget it.</a:t>
+            </a:r>
+            <a:endParaRPr lang="en-US" sz="1800" dirty="0"/>
+          </a:p>
+        </p:txBody>
+      </p:sp>
+      <p:sp>
+        <p:nvSpPr>
+          <p:cNvPr id="10" name="Text 8"/>
+          <p:cNvSpPr/>
+          <p:nvPr/>
+        </p:nvSpPr>
+        <p:spPr>
+          <a:xfrm>
+            <a:off x="1371600" y="2834640"/>
+            <a:ext cx="7040880" cy="594360"/>
+          </a:xfrm>
+          <a:prstGeom prst="rect">
+            <a:avLst/>
+          </a:prstGeom>
+          <a:noFill/>
+          <a:ln/>
+        </p:spPr>
+        <p:txBody>
+          <a:bodyPr wrap="square" lIns="0" tIns="0" rIns="0" bIns="0" rtlCol="0" anchor="ctr"/>
+          <a:lstStyle/>
+          <a:p>
+            <a:pPr indent="0" marL="0">
+              <a:buNone/>
+            </a:pPr>
+            <a:r>
+              <a:rPr lang="en-US" sz="1200" dirty="0">
+                <a:solidFill>
+                  <a:srgbClr val="64748B"/>
+                </a:solidFill>
+                <a:latin typeface="Calibri" pitchFamily="34" charset="0"/>
+                <a:ea typeface="Calibri" pitchFamily="34" charset="-122"/>
+                <a:cs typeface="Calibri" pitchFamily="34" charset="-120"/>
+              </a:rPr>
+              <a:t>User IDs go in traces. Latency goes in histograms. Continuous values get bucketed. The Collector is where you enforce the budget at the edge — not the TSDB at 3am.</a:t>
+            </a:r>
+            <a:endParaRPr lang="en-US" sz="1200" dirty="0"/>
+          </a:p>
+        </p:txBody>
+      </p:sp>
+      <p:sp>
+        <p:nvSpPr>
+          <p:cNvPr id="11" name="Shape 9"/>
+          <p:cNvSpPr/>
+          <p:nvPr/>
+        </p:nvSpPr>
+        <p:spPr>
+          <a:xfrm>
+            <a:off x="457200" y="3703320"/>
+            <a:ext cx="731520" cy="731520"/>
+          </a:xfrm>
+          <a:prstGeom prst="ellipse">
+            <a:avLst/>
+          </a:prstGeom>
+          <a:solidFill>
+            <a:srgbClr val="DC2626"/>
+          </a:solidFill>
+          <a:ln/>
+        </p:spPr>
+      </p:sp>
+      <p:sp>
+        <p:nvSpPr>
+          <p:cNvPr id="12" name="Text 10"/>
+          <p:cNvSpPr/>
+          <p:nvPr/>
+        </p:nvSpPr>
+        <p:spPr>
+          <a:xfrm>
+            <a:off x="457200" y="3703320"/>
+            <a:ext cx="731520" cy="731520"/>
+          </a:xfrm>
+          <a:prstGeom prst="rect">
+            <a:avLst/>
+          </a:prstGeom>
+          <a:noFill/>
+          <a:ln/>
+        </p:spPr>
+        <p:txBody>
+          <a:bodyPr wrap="square" lIns="0" tIns="0" rIns="0" bIns="0" rtlCol="0" anchor="ctr"/>
+          <a:lstStyle/>
+          <a:p>
+            <a:pPr algn="ctr" indent="0" marL="0">
+              <a:buNone/>
+            </a:pPr>
+            <a:r>
+              <a:rPr lang="en-US" sz="3200" b="1" dirty="0">
+                <a:solidFill>
+                  <a:srgbClr val="FFFFFF"/>
+                </a:solidFill>
+                <a:latin typeface="Calibri" pitchFamily="34" charset="0"/>
+                <a:ea typeface="Calibri" pitchFamily="34" charset="-122"/>
+                <a:cs typeface="Calibri" pitchFamily="34" charset="-120"/>
+              </a:rPr>
+              <a:t>3</a:t>
+            </a:r>
+            <a:endParaRPr lang="en-US" sz="3200" dirty="0"/>
+          </a:p>
+        </p:txBody>
+      </p:sp>
+      <p:sp>
+        <p:nvSpPr>
+          <p:cNvPr id="13" name="Text 11"/>
+          <p:cNvSpPr/>
+          <p:nvPr/>
+        </p:nvSpPr>
+        <p:spPr>
+          <a:xfrm>
+            <a:off x="1371600" y="3611880"/>
+            <a:ext cx="7040880" cy="411480"/>
+          </a:xfrm>
+          <a:prstGeom prst="rect">
+            <a:avLst/>
+          </a:prstGeom>
+          <a:noFill/>
+          <a:ln/>
+        </p:spPr>
+        <p:txBody>
+          <a:bodyPr wrap="square" lIns="0" tIns="0" rIns="0" bIns="0" rtlCol="0" anchor="ctr"/>
+          <a:lstStyle/>
+          <a:p>
+            <a:pPr indent="0" marL="0">
+              <a:buNone/>
+            </a:pPr>
+            <a:r>
+              <a:rPr lang="en-US" sz="1800" b="1" dirty="0">
                 <a:solidFill>
                   <a:srgbClr val="0F172A"/>
                 </a:solidFill>
@@ -10747,243 +11333,9 @@
                 <a:ea typeface="Calibri" pitchFamily="34" charset="-122"/>
                 <a:cs typeface="Calibri" pitchFamily="34" charset="-120"/>
               </a:rPr>
-              <a:t>Spring Boot 4 OTel</a:t>
-            </a:r>
-            <a:endParaRPr lang="en-US" sz="1500" dirty="0"/>
-          </a:p>
-        </p:txBody>
-      </p:sp>
-      <p:sp>
-        <p:nvSpPr>
-          <p:cNvPr id="8" name="Text 6"/>
-          <p:cNvSpPr/>
-          <p:nvPr/>
-        </p:nvSpPr>
-        <p:spPr>
-          <a:xfrm>
-            <a:off x="3931920" y="2377440"/>
-            <a:ext cx="4572000" cy="502920"/>
-          </a:xfrm>
-          <a:prstGeom prst="rect">
-            <a:avLst/>
-          </a:prstGeom>
-          <a:noFill/>
-          <a:ln/>
-        </p:spPr>
-        <p:txBody>
-          <a:bodyPr wrap="square" lIns="0" tIns="0" rIns="0" bIns="0" rtlCol="0" anchor="ctr"/>
-          <a:lstStyle/>
-          <a:p>
-            <a:pPr indent="0" marL="0">
-              <a:buNone/>
-            </a:pPr>
-            <a:r>
-              <a:rPr lang="en-US" sz="1300" dirty="0">
-                <a:solidFill>
-                  <a:srgbClr val="0D9488"/>
-                </a:solidFill>
-                <a:latin typeface="Consolas" pitchFamily="34" charset="0"/>
-                <a:ea typeface="Consolas" pitchFamily="34" charset="-122"/>
-                <a:cs typeface="Consolas" pitchFamily="34" charset="-120"/>
-              </a:rPr>
-              <a:t>spring.io/blog/2025/11/18/opentelemetry-with-spring-boot</a:t>
-            </a:r>
-            <a:endParaRPr lang="en-US" sz="1300" dirty="0"/>
-          </a:p>
-        </p:txBody>
-      </p:sp>
-      <p:sp>
-        <p:nvSpPr>
-          <p:cNvPr id="9" name="Text 7"/>
-          <p:cNvSpPr/>
-          <p:nvPr/>
-        </p:nvSpPr>
-        <p:spPr>
-          <a:xfrm>
-            <a:off x="640080" y="2926080"/>
-            <a:ext cx="3200400" cy="502920"/>
-          </a:xfrm>
-          <a:prstGeom prst="rect">
-            <a:avLst/>
-          </a:prstGeom>
-          <a:noFill/>
-          <a:ln/>
-        </p:spPr>
-        <p:txBody>
-          <a:bodyPr wrap="square" lIns="0" tIns="0" rIns="0" bIns="0" rtlCol="0" anchor="ctr"/>
-          <a:lstStyle/>
-          <a:p>
-            <a:pPr indent="0" marL="0">
-              <a:buNone/>
-            </a:pPr>
-            <a:r>
-              <a:rPr lang="en-US" sz="1500" b="1" dirty="0">
-                <a:solidFill>
-                  <a:srgbClr val="0F172A"/>
-                </a:solidFill>
-                <a:latin typeface="Calibri" pitchFamily="34" charset="0"/>
-                <a:ea typeface="Calibri" pitchFamily="34" charset="-122"/>
-                <a:cs typeface="Calibri" pitchFamily="34" charset="-120"/>
-              </a:rPr>
-              <a:t>Project Leyden</a:t>
-            </a:r>
-            <a:endParaRPr lang="en-US" sz="1500" dirty="0"/>
-          </a:p>
-        </p:txBody>
-      </p:sp>
-      <p:sp>
-        <p:nvSpPr>
-          <p:cNvPr id="10" name="Text 8"/>
-          <p:cNvSpPr/>
-          <p:nvPr/>
-        </p:nvSpPr>
-        <p:spPr>
-          <a:xfrm>
-            <a:off x="3931920" y="2926080"/>
-            <a:ext cx="4572000" cy="502920"/>
-          </a:xfrm>
-          <a:prstGeom prst="rect">
-            <a:avLst/>
-          </a:prstGeom>
-          <a:noFill/>
-          <a:ln/>
-        </p:spPr>
-        <p:txBody>
-          <a:bodyPr wrap="square" lIns="0" tIns="0" rIns="0" bIns="0" rtlCol="0" anchor="ctr"/>
-          <a:lstStyle/>
-          <a:p>
-            <a:pPr indent="0" marL="0">
-              <a:buNone/>
-            </a:pPr>
-            <a:r>
-              <a:rPr lang="en-US" sz="1300" dirty="0">
-                <a:solidFill>
-                  <a:srgbClr val="0D9488"/>
-                </a:solidFill>
-                <a:latin typeface="Consolas" pitchFamily="34" charset="0"/>
-                <a:ea typeface="Consolas" pitchFamily="34" charset="-122"/>
-                <a:cs typeface="Consolas" pitchFamily="34" charset="-120"/>
-              </a:rPr>
-              <a:t>openjdk.org/projects/leyden</a:t>
-            </a:r>
-            <a:endParaRPr lang="en-US" sz="1300" dirty="0"/>
-          </a:p>
-        </p:txBody>
-      </p:sp>
-      <p:sp>
-        <p:nvSpPr>
-          <p:cNvPr id="11" name="Text 9"/>
-          <p:cNvSpPr/>
-          <p:nvPr/>
-        </p:nvSpPr>
-        <p:spPr>
-          <a:xfrm>
-            <a:off x="640080" y="3474720"/>
-            <a:ext cx="3200400" cy="502920"/>
-          </a:xfrm>
-          <a:prstGeom prst="rect">
-            <a:avLst/>
-          </a:prstGeom>
-          <a:noFill/>
-          <a:ln/>
-        </p:spPr>
-        <p:txBody>
-          <a:bodyPr wrap="square" lIns="0" tIns="0" rIns="0" bIns="0" rtlCol="0" anchor="ctr"/>
-          <a:lstStyle/>
-          <a:p>
-            <a:pPr indent="0" marL="0">
-              <a:buNone/>
-            </a:pPr>
-            <a:r>
-              <a:rPr lang="en-US" sz="1500" b="1" dirty="0">
-                <a:solidFill>
-                  <a:srgbClr val="0F172A"/>
-                </a:solidFill>
-                <a:latin typeface="Calibri" pitchFamily="34" charset="0"/>
-                <a:ea typeface="Calibri" pitchFamily="34" charset="-122"/>
-                <a:cs typeface="Calibri" pitchFamily="34" charset="-120"/>
-              </a:rPr>
-              <a:t>Grafana LGTM</a:t>
-            </a:r>
-            <a:endParaRPr lang="en-US" sz="1500" dirty="0"/>
-          </a:p>
-        </p:txBody>
-      </p:sp>
-      <p:sp>
-        <p:nvSpPr>
-          <p:cNvPr id="12" name="Text 10"/>
-          <p:cNvSpPr/>
-          <p:nvPr/>
-        </p:nvSpPr>
-        <p:spPr>
-          <a:xfrm>
-            <a:off x="3931920" y="3474720"/>
-            <a:ext cx="4572000" cy="502920"/>
-          </a:xfrm>
-          <a:prstGeom prst="rect">
-            <a:avLst/>
-          </a:prstGeom>
-          <a:noFill/>
-          <a:ln/>
-        </p:spPr>
-        <p:txBody>
-          <a:bodyPr wrap="square" lIns="0" tIns="0" rIns="0" bIns="0" rtlCol="0" anchor="ctr"/>
-          <a:lstStyle/>
-          <a:p>
-            <a:pPr indent="0" marL="0">
-              <a:buNone/>
-            </a:pPr>
-            <a:r>
-              <a:rPr lang="en-US" sz="1300" dirty="0">
-                <a:solidFill>
-                  <a:srgbClr val="0D9488"/>
-                </a:solidFill>
-                <a:latin typeface="Consolas" pitchFamily="34" charset="0"/>
-                <a:ea typeface="Consolas" pitchFamily="34" charset="-122"/>
-                <a:cs typeface="Consolas" pitchFamily="34" charset="-120"/>
-              </a:rPr>
-              <a:t>github.com/grafana/docker-otel-lgtm</a:t>
-            </a:r>
-            <a:endParaRPr lang="en-US" sz="1300" dirty="0"/>
-          </a:p>
-        </p:txBody>
-      </p:sp>
-      <p:sp>
-        <p:nvSpPr>
-          <p:cNvPr id="13" name="Text 11"/>
-          <p:cNvSpPr/>
-          <p:nvPr/>
-        </p:nvSpPr>
-        <p:spPr>
-          <a:xfrm>
-            <a:off x="640080" y="4023360"/>
-            <a:ext cx="3200400" cy="502920"/>
-          </a:xfrm>
-          <a:prstGeom prst="rect">
-            <a:avLst/>
-          </a:prstGeom>
-          <a:noFill/>
-          <a:ln/>
-        </p:spPr>
-        <p:txBody>
-          <a:bodyPr wrap="square" lIns="0" tIns="0" rIns="0" bIns="0" rtlCol="0" anchor="ctr"/>
-          <a:lstStyle/>
-          <a:p>
-            <a:pPr indent="0" marL="0">
-              <a:buNone/>
-            </a:pPr>
-            <a:r>
-              <a:rPr lang="en-US" sz="1500" b="1" dirty="0">
-                <a:solidFill>
-                  <a:srgbClr val="0F172A"/>
-                </a:solidFill>
-                <a:latin typeface="Calibri" pitchFamily="34" charset="0"/>
-                <a:ea typeface="Calibri" pitchFamily="34" charset="-122"/>
-                <a:cs typeface="Calibri" pitchFamily="34" charset="-120"/>
-              </a:rPr>
-              <a:t>OTel Collector</a:t>
-            </a:r>
-            <a:endParaRPr lang="en-US" sz="1500" dirty="0"/>
+              <a:t>Match telemetry to workload sensitivity.</a:t>
+            </a:r>
+            <a:endParaRPr lang="en-US" sz="1800" dirty="0"/>
           </a:p>
         </p:txBody>
       </p:sp>
@@ -10995,34 +11347,34 @@
         </p:nvSpPr>
         <p:spPr>
           <a:xfrm>
-            <a:off x="3931920" y="4023360"/>
-            <a:ext cx="4572000" cy="502920"/>
-          </a:xfrm>
-          <a:prstGeom prst="rect">
-            <a:avLst/>
-          </a:prstGeom>
-          <a:noFill/>
-          <a:ln/>
-        </p:spPr>
-        <p:txBody>
-          <a:bodyPr wrap="square" lIns="0" tIns="0" rIns="0" bIns="0" rtlCol="0" anchor="ctr"/>
-          <a:lstStyle/>
-          <a:p>
-            <a:pPr indent="0" marL="0">
-              <a:buNone/>
-            </a:pPr>
-            <a:r>
-              <a:rPr lang="en-US" sz="1300" dirty="0">
-                <a:solidFill>
-                  <a:srgbClr val="0D9488"/>
-                </a:solidFill>
-                <a:latin typeface="Consolas" pitchFamily="34" charset="0"/>
-                <a:ea typeface="Consolas" pitchFamily="34" charset="-122"/>
-                <a:cs typeface="Consolas" pitchFamily="34" charset="-120"/>
-              </a:rPr>
-              <a:t>github.com/open-telemetry/opentelemetry-collector</a:t>
-            </a:r>
-            <a:endParaRPr lang="en-US" sz="1300" dirty="0"/>
+            <a:off x="1371600" y="4023360"/>
+            <a:ext cx="7040880" cy="594360"/>
+          </a:xfrm>
+          <a:prstGeom prst="rect">
+            <a:avLst/>
+          </a:prstGeom>
+          <a:noFill/>
+          <a:ln/>
+        </p:spPr>
+        <p:txBody>
+          <a:bodyPr wrap="square" lIns="0" tIns="0" rIns="0" bIns="0" rtlCol="0" anchor="ctr"/>
+          <a:lstStyle/>
+          <a:p>
+            <a:pPr indent="0" marL="0">
+              <a:buNone/>
+            </a:pPr>
+            <a:r>
+              <a:rPr lang="en-US" sz="1200" dirty="0">
+                <a:solidFill>
+                  <a:srgbClr val="64748B"/>
+                </a:solidFill>
+                <a:latin typeface="Calibri" pitchFamily="34" charset="0"/>
+                <a:ea typeface="Calibri" pitchFamily="34" charset="-122"/>
+                <a:cs typeface="Calibri" pitchFamily="34" charset="-120"/>
+              </a:rPr>
+              <a:t>OTel agent for long-running services where the 750ms tax amortizes. SDK starter for cold-scale and serverless. Framework choice matters more than vendor.</a:t>
+            </a:r>
+            <a:endParaRPr lang="en-US" sz="1200" dirty="0"/>
           </a:p>
         </p:txBody>
       </p:sp>
@@ -11115,6 +11467,623 @@
 <file path=ppt/slides/slide26.xml><?xml version="1.0" encoding="utf-8"?>
 <p:sld xmlns:a="http://schemas.openxmlformats.org/drawingml/2006/main" xmlns:r="http://schemas.openxmlformats.org/officeDocument/2006/relationships" xmlns:p="http://schemas.openxmlformats.org/presentationml/2006/main">
   <p:cSld name="Slide 26">
+    <p:bg>
+      <p:bgPr>
+        <a:solidFill>
+          <a:srgbClr val="FFFFFF"/>
+        </a:solidFill>
+      </p:bgPr>
+    </p:bg>
+    <p:spTree>
+      <p:nvGrpSpPr>
+        <p:cNvPr id="1" name=""/>
+        <p:cNvGrpSpPr/>
+        <p:nvPr/>
+      </p:nvGrpSpPr>
+      <p:grpSpPr>
+        <a:xfrm>
+          <a:off x="0" y="0"/>
+          <a:ext cx="0" cy="0"/>
+          <a:chOff x="0" y="0"/>
+          <a:chExt cx="0" cy="0"/>
+        </a:xfrm>
+      </p:grpSpPr>
+      <p:sp>
+        <p:nvSpPr>
+          <p:cNvPr id="2" name="Text 0"/>
+          <p:cNvSpPr/>
+          <p:nvPr/>
+        </p:nvSpPr>
+        <p:spPr>
+          <a:xfrm>
+            <a:off x="457200" y="365760"/>
+            <a:ext cx="8229600" cy="548640"/>
+          </a:xfrm>
+          <a:prstGeom prst="rect">
+            <a:avLst/>
+          </a:prstGeom>
+          <a:noFill/>
+          <a:ln/>
+        </p:spPr>
+        <p:txBody>
+          <a:bodyPr wrap="square" lIns="0" tIns="0" rIns="0" bIns="0" rtlCol="0" anchor="ctr"/>
+          <a:lstStyle/>
+          <a:p>
+            <a:pPr indent="0" marL="0">
+              <a:buNone/>
+            </a:pPr>
+            <a:r>
+              <a:rPr lang="en-US" sz="3600" b="1" dirty="0">
+                <a:solidFill>
+                  <a:srgbClr val="0F172A"/>
+                </a:solidFill>
+                <a:latin typeface="Calibri" pitchFamily="34" charset="0"/>
+                <a:ea typeface="Calibri" pitchFamily="34" charset="-122"/>
+                <a:cs typeface="Calibri" pitchFamily="34" charset="-120"/>
+              </a:rPr>
+              <a:t>Resources &amp; References</a:t>
+            </a:r>
+            <a:endParaRPr lang="en-US" sz="3600" dirty="0"/>
+          </a:p>
+        </p:txBody>
+      </p:sp>
+      <p:sp>
+        <p:nvSpPr>
+          <p:cNvPr id="3" name="Text 1"/>
+          <p:cNvSpPr/>
+          <p:nvPr/>
+        </p:nvSpPr>
+        <p:spPr>
+          <a:xfrm>
+            <a:off x="640080" y="1280160"/>
+            <a:ext cx="3200400" cy="502920"/>
+          </a:xfrm>
+          <a:prstGeom prst="rect">
+            <a:avLst/>
+          </a:prstGeom>
+          <a:noFill/>
+          <a:ln/>
+        </p:spPr>
+        <p:txBody>
+          <a:bodyPr wrap="square" lIns="0" tIns="0" rIns="0" bIns="0" rtlCol="0" anchor="ctr"/>
+          <a:lstStyle/>
+          <a:p>
+            <a:pPr indent="0" marL="0">
+              <a:buNone/>
+            </a:pPr>
+            <a:r>
+              <a:rPr lang="en-US" sz="1500" b="1" dirty="0">
+                <a:solidFill>
+                  <a:srgbClr val="0F172A"/>
+                </a:solidFill>
+                <a:latin typeface="Calibri" pitchFamily="34" charset="0"/>
+                <a:ea typeface="Calibri" pitchFamily="34" charset="-122"/>
+                <a:cs typeface="Calibri" pitchFamily="34" charset="-120"/>
+              </a:rPr>
+              <a:t>This talk's code</a:t>
+            </a:r>
+            <a:endParaRPr lang="en-US" sz="1500" dirty="0"/>
+          </a:p>
+        </p:txBody>
+      </p:sp>
+      <p:sp>
+        <p:nvSpPr>
+          <p:cNvPr id="4" name="Text 2"/>
+          <p:cNvSpPr/>
+          <p:nvPr/>
+        </p:nvSpPr>
+        <p:spPr>
+          <a:xfrm>
+            <a:off x="3931920" y="1280160"/>
+            <a:ext cx="4572000" cy="502920"/>
+          </a:xfrm>
+          <a:prstGeom prst="rect">
+            <a:avLst/>
+          </a:prstGeom>
+          <a:noFill/>
+          <a:ln/>
+        </p:spPr>
+        <p:txBody>
+          <a:bodyPr wrap="square" lIns="0" tIns="0" rIns="0" bIns="0" rtlCol="0" anchor="ctr"/>
+          <a:lstStyle/>
+          <a:p>
+            <a:pPr indent="0" marL="0">
+              <a:buNone/>
+            </a:pPr>
+            <a:r>
+              <a:rPr lang="en-US" sz="1300" dirty="0">
+                <a:solidFill>
+                  <a:srgbClr val="0D9488"/>
+                </a:solidFill>
+                <a:latin typeface="Consolas" pitchFamily="34" charset="0"/>
+                <a:ea typeface="Consolas" pitchFamily="34" charset="-122"/>
+                <a:cs typeface="Consolas" pitchFamily="34" charset="-120"/>
+              </a:rPr>
+              <a:t>github.com/patterncatalyst/otel-observability-demos</a:t>
+            </a:r>
+            <a:endParaRPr lang="en-US" sz="1300" dirty="0"/>
+          </a:p>
+        </p:txBody>
+      </p:sp>
+      <p:sp>
+        <p:nvSpPr>
+          <p:cNvPr id="5" name="Text 3"/>
+          <p:cNvSpPr/>
+          <p:nvPr/>
+        </p:nvSpPr>
+        <p:spPr>
+          <a:xfrm>
+            <a:off x="640080" y="1828800"/>
+            <a:ext cx="3200400" cy="502920"/>
+          </a:xfrm>
+          <a:prstGeom prst="rect">
+            <a:avLst/>
+          </a:prstGeom>
+          <a:noFill/>
+          <a:ln/>
+        </p:spPr>
+        <p:txBody>
+          <a:bodyPr wrap="square" lIns="0" tIns="0" rIns="0" bIns="0" rtlCol="0" anchor="ctr"/>
+          <a:lstStyle/>
+          <a:p>
+            <a:pPr indent="0" marL="0">
+              <a:buNone/>
+            </a:pPr>
+            <a:r>
+              <a:rPr lang="en-US" sz="1500" b="1" dirty="0">
+                <a:solidFill>
+                  <a:srgbClr val="0F172A"/>
+                </a:solidFill>
+                <a:latin typeface="Calibri" pitchFamily="34" charset="0"/>
+                <a:ea typeface="Calibri" pitchFamily="34" charset="-122"/>
+                <a:cs typeface="Calibri" pitchFamily="34" charset="-120"/>
+              </a:rPr>
+              <a:t>OpenTelemetry</a:t>
+            </a:r>
+            <a:endParaRPr lang="en-US" sz="1500" dirty="0"/>
+          </a:p>
+        </p:txBody>
+      </p:sp>
+      <p:sp>
+        <p:nvSpPr>
+          <p:cNvPr id="6" name="Text 4"/>
+          <p:cNvSpPr/>
+          <p:nvPr/>
+        </p:nvSpPr>
+        <p:spPr>
+          <a:xfrm>
+            <a:off x="3931920" y="1828800"/>
+            <a:ext cx="4572000" cy="502920"/>
+          </a:xfrm>
+          <a:prstGeom prst="rect">
+            <a:avLst/>
+          </a:prstGeom>
+          <a:noFill/>
+          <a:ln/>
+        </p:spPr>
+        <p:txBody>
+          <a:bodyPr wrap="square" lIns="0" tIns="0" rIns="0" bIns="0" rtlCol="0" anchor="ctr"/>
+          <a:lstStyle/>
+          <a:p>
+            <a:pPr indent="0" marL="0">
+              <a:buNone/>
+            </a:pPr>
+            <a:r>
+              <a:rPr lang="en-US" sz="1300" dirty="0">
+                <a:solidFill>
+                  <a:srgbClr val="0D9488"/>
+                </a:solidFill>
+                <a:latin typeface="Consolas" pitchFamily="34" charset="0"/>
+                <a:ea typeface="Consolas" pitchFamily="34" charset="-122"/>
+                <a:cs typeface="Consolas" pitchFamily="34" charset="-120"/>
+              </a:rPr>
+              <a:t>opentelemetry.io</a:t>
+            </a:r>
+            <a:endParaRPr lang="en-US" sz="1300" dirty="0"/>
+          </a:p>
+        </p:txBody>
+      </p:sp>
+      <p:sp>
+        <p:nvSpPr>
+          <p:cNvPr id="7" name="Text 5"/>
+          <p:cNvSpPr/>
+          <p:nvPr/>
+        </p:nvSpPr>
+        <p:spPr>
+          <a:xfrm>
+            <a:off x="640080" y="2377440"/>
+            <a:ext cx="3200400" cy="502920"/>
+          </a:xfrm>
+          <a:prstGeom prst="rect">
+            <a:avLst/>
+          </a:prstGeom>
+          <a:noFill/>
+          <a:ln/>
+        </p:spPr>
+        <p:txBody>
+          <a:bodyPr wrap="square" lIns="0" tIns="0" rIns="0" bIns="0" rtlCol="0" anchor="ctr"/>
+          <a:lstStyle/>
+          <a:p>
+            <a:pPr indent="0" marL="0">
+              <a:buNone/>
+            </a:pPr>
+            <a:r>
+              <a:rPr lang="en-US" sz="1500" b="1" dirty="0">
+                <a:solidFill>
+                  <a:srgbClr val="0F172A"/>
+                </a:solidFill>
+                <a:latin typeface="Calibri" pitchFamily="34" charset="0"/>
+                <a:ea typeface="Calibri" pitchFamily="34" charset="-122"/>
+                <a:cs typeface="Calibri" pitchFamily="34" charset="-120"/>
+              </a:rPr>
+              <a:t>Spring Boot 4 OTel</a:t>
+            </a:r>
+            <a:endParaRPr lang="en-US" sz="1500" dirty="0"/>
+          </a:p>
+        </p:txBody>
+      </p:sp>
+      <p:sp>
+        <p:nvSpPr>
+          <p:cNvPr id="8" name="Text 6"/>
+          <p:cNvSpPr/>
+          <p:nvPr/>
+        </p:nvSpPr>
+        <p:spPr>
+          <a:xfrm>
+            <a:off x="3931920" y="2377440"/>
+            <a:ext cx="4572000" cy="502920"/>
+          </a:xfrm>
+          <a:prstGeom prst="rect">
+            <a:avLst/>
+          </a:prstGeom>
+          <a:noFill/>
+          <a:ln/>
+        </p:spPr>
+        <p:txBody>
+          <a:bodyPr wrap="square" lIns="0" tIns="0" rIns="0" bIns="0" rtlCol="0" anchor="ctr"/>
+          <a:lstStyle/>
+          <a:p>
+            <a:pPr indent="0" marL="0">
+              <a:buNone/>
+            </a:pPr>
+            <a:r>
+              <a:rPr lang="en-US" sz="1300" dirty="0">
+                <a:solidFill>
+                  <a:srgbClr val="0D9488"/>
+                </a:solidFill>
+                <a:latin typeface="Consolas" pitchFamily="34" charset="0"/>
+                <a:ea typeface="Consolas" pitchFamily="34" charset="-122"/>
+                <a:cs typeface="Consolas" pitchFamily="34" charset="-120"/>
+              </a:rPr>
+              <a:t>spring.io/blog/2025/11/18/opentelemetry-with-spring-boot</a:t>
+            </a:r>
+            <a:endParaRPr lang="en-US" sz="1300" dirty="0"/>
+          </a:p>
+        </p:txBody>
+      </p:sp>
+      <p:sp>
+        <p:nvSpPr>
+          <p:cNvPr id="9" name="Text 7"/>
+          <p:cNvSpPr/>
+          <p:nvPr/>
+        </p:nvSpPr>
+        <p:spPr>
+          <a:xfrm>
+            <a:off x="640080" y="2926080"/>
+            <a:ext cx="3200400" cy="502920"/>
+          </a:xfrm>
+          <a:prstGeom prst="rect">
+            <a:avLst/>
+          </a:prstGeom>
+          <a:noFill/>
+          <a:ln/>
+        </p:spPr>
+        <p:txBody>
+          <a:bodyPr wrap="square" lIns="0" tIns="0" rIns="0" bIns="0" rtlCol="0" anchor="ctr"/>
+          <a:lstStyle/>
+          <a:p>
+            <a:pPr indent="0" marL="0">
+              <a:buNone/>
+            </a:pPr>
+            <a:r>
+              <a:rPr lang="en-US" sz="1500" b="1" dirty="0">
+                <a:solidFill>
+                  <a:srgbClr val="0F172A"/>
+                </a:solidFill>
+                <a:latin typeface="Calibri" pitchFamily="34" charset="0"/>
+                <a:ea typeface="Calibri" pitchFamily="34" charset="-122"/>
+                <a:cs typeface="Calibri" pitchFamily="34" charset="-120"/>
+              </a:rPr>
+              <a:t>Project Leyden</a:t>
+            </a:r>
+            <a:endParaRPr lang="en-US" sz="1500" dirty="0"/>
+          </a:p>
+        </p:txBody>
+      </p:sp>
+      <p:sp>
+        <p:nvSpPr>
+          <p:cNvPr id="10" name="Text 8"/>
+          <p:cNvSpPr/>
+          <p:nvPr/>
+        </p:nvSpPr>
+        <p:spPr>
+          <a:xfrm>
+            <a:off x="3931920" y="2926080"/>
+            <a:ext cx="4572000" cy="502920"/>
+          </a:xfrm>
+          <a:prstGeom prst="rect">
+            <a:avLst/>
+          </a:prstGeom>
+          <a:noFill/>
+          <a:ln/>
+        </p:spPr>
+        <p:txBody>
+          <a:bodyPr wrap="square" lIns="0" tIns="0" rIns="0" bIns="0" rtlCol="0" anchor="ctr"/>
+          <a:lstStyle/>
+          <a:p>
+            <a:pPr indent="0" marL="0">
+              <a:buNone/>
+            </a:pPr>
+            <a:r>
+              <a:rPr lang="en-US" sz="1300" dirty="0">
+                <a:solidFill>
+                  <a:srgbClr val="0D9488"/>
+                </a:solidFill>
+                <a:latin typeface="Consolas" pitchFamily="34" charset="0"/>
+                <a:ea typeface="Consolas" pitchFamily="34" charset="-122"/>
+                <a:cs typeface="Consolas" pitchFamily="34" charset="-120"/>
+              </a:rPr>
+              <a:t>openjdk.org/projects/leyden</a:t>
+            </a:r>
+            <a:endParaRPr lang="en-US" sz="1300" dirty="0"/>
+          </a:p>
+        </p:txBody>
+      </p:sp>
+      <p:sp>
+        <p:nvSpPr>
+          <p:cNvPr id="11" name="Text 9"/>
+          <p:cNvSpPr/>
+          <p:nvPr/>
+        </p:nvSpPr>
+        <p:spPr>
+          <a:xfrm>
+            <a:off x="640080" y="3474720"/>
+            <a:ext cx="3200400" cy="502920"/>
+          </a:xfrm>
+          <a:prstGeom prst="rect">
+            <a:avLst/>
+          </a:prstGeom>
+          <a:noFill/>
+          <a:ln/>
+        </p:spPr>
+        <p:txBody>
+          <a:bodyPr wrap="square" lIns="0" tIns="0" rIns="0" bIns="0" rtlCol="0" anchor="ctr"/>
+          <a:lstStyle/>
+          <a:p>
+            <a:pPr indent="0" marL="0">
+              <a:buNone/>
+            </a:pPr>
+            <a:r>
+              <a:rPr lang="en-US" sz="1500" b="1" dirty="0">
+                <a:solidFill>
+                  <a:srgbClr val="0F172A"/>
+                </a:solidFill>
+                <a:latin typeface="Calibri" pitchFamily="34" charset="0"/>
+                <a:ea typeface="Calibri" pitchFamily="34" charset="-122"/>
+                <a:cs typeface="Calibri" pitchFamily="34" charset="-120"/>
+              </a:rPr>
+              <a:t>Grafana LGTM</a:t>
+            </a:r>
+            <a:endParaRPr lang="en-US" sz="1500" dirty="0"/>
+          </a:p>
+        </p:txBody>
+      </p:sp>
+      <p:sp>
+        <p:nvSpPr>
+          <p:cNvPr id="12" name="Text 10"/>
+          <p:cNvSpPr/>
+          <p:nvPr/>
+        </p:nvSpPr>
+        <p:spPr>
+          <a:xfrm>
+            <a:off x="3931920" y="3474720"/>
+            <a:ext cx="4572000" cy="502920"/>
+          </a:xfrm>
+          <a:prstGeom prst="rect">
+            <a:avLst/>
+          </a:prstGeom>
+          <a:noFill/>
+          <a:ln/>
+        </p:spPr>
+        <p:txBody>
+          <a:bodyPr wrap="square" lIns="0" tIns="0" rIns="0" bIns="0" rtlCol="0" anchor="ctr"/>
+          <a:lstStyle/>
+          <a:p>
+            <a:pPr indent="0" marL="0">
+              <a:buNone/>
+            </a:pPr>
+            <a:r>
+              <a:rPr lang="en-US" sz="1300" dirty="0">
+                <a:solidFill>
+                  <a:srgbClr val="0D9488"/>
+                </a:solidFill>
+                <a:latin typeface="Consolas" pitchFamily="34" charset="0"/>
+                <a:ea typeface="Consolas" pitchFamily="34" charset="-122"/>
+                <a:cs typeface="Consolas" pitchFamily="34" charset="-120"/>
+              </a:rPr>
+              <a:t>github.com/grafana/docker-otel-lgtm</a:t>
+            </a:r>
+            <a:endParaRPr lang="en-US" sz="1300" dirty="0"/>
+          </a:p>
+        </p:txBody>
+      </p:sp>
+      <p:sp>
+        <p:nvSpPr>
+          <p:cNvPr id="13" name="Text 11"/>
+          <p:cNvSpPr/>
+          <p:nvPr/>
+        </p:nvSpPr>
+        <p:spPr>
+          <a:xfrm>
+            <a:off x="640080" y="4023360"/>
+            <a:ext cx="3200400" cy="502920"/>
+          </a:xfrm>
+          <a:prstGeom prst="rect">
+            <a:avLst/>
+          </a:prstGeom>
+          <a:noFill/>
+          <a:ln/>
+        </p:spPr>
+        <p:txBody>
+          <a:bodyPr wrap="square" lIns="0" tIns="0" rIns="0" bIns="0" rtlCol="0" anchor="ctr"/>
+          <a:lstStyle/>
+          <a:p>
+            <a:pPr indent="0" marL="0">
+              <a:buNone/>
+            </a:pPr>
+            <a:r>
+              <a:rPr lang="en-US" sz="1500" b="1" dirty="0">
+                <a:solidFill>
+                  <a:srgbClr val="0F172A"/>
+                </a:solidFill>
+                <a:latin typeface="Calibri" pitchFamily="34" charset="0"/>
+                <a:ea typeface="Calibri" pitchFamily="34" charset="-122"/>
+                <a:cs typeface="Calibri" pitchFamily="34" charset="-120"/>
+              </a:rPr>
+              <a:t>OTel Collector</a:t>
+            </a:r>
+            <a:endParaRPr lang="en-US" sz="1500" dirty="0"/>
+          </a:p>
+        </p:txBody>
+      </p:sp>
+      <p:sp>
+        <p:nvSpPr>
+          <p:cNvPr id="14" name="Text 12"/>
+          <p:cNvSpPr/>
+          <p:nvPr/>
+        </p:nvSpPr>
+        <p:spPr>
+          <a:xfrm>
+            <a:off x="3931920" y="4023360"/>
+            <a:ext cx="4572000" cy="502920"/>
+          </a:xfrm>
+          <a:prstGeom prst="rect">
+            <a:avLst/>
+          </a:prstGeom>
+          <a:noFill/>
+          <a:ln/>
+        </p:spPr>
+        <p:txBody>
+          <a:bodyPr wrap="square" lIns="0" tIns="0" rIns="0" bIns="0" rtlCol="0" anchor="ctr"/>
+          <a:lstStyle/>
+          <a:p>
+            <a:pPr indent="0" marL="0">
+              <a:buNone/>
+            </a:pPr>
+            <a:r>
+              <a:rPr lang="en-US" sz="1300" dirty="0">
+                <a:solidFill>
+                  <a:srgbClr val="0D9488"/>
+                </a:solidFill>
+                <a:latin typeface="Consolas" pitchFamily="34" charset="0"/>
+                <a:ea typeface="Consolas" pitchFamily="34" charset="-122"/>
+                <a:cs typeface="Consolas" pitchFamily="34" charset="-120"/>
+              </a:rPr>
+              <a:t>github.com/open-telemetry/opentelemetry-collector</a:t>
+            </a:r>
+            <a:endParaRPr lang="en-US" sz="1300" dirty="0"/>
+          </a:p>
+        </p:txBody>
+      </p:sp>
+      <p:sp>
+        <p:nvSpPr>
+          <p:cNvPr id="15" name="Text 13"/>
+          <p:cNvSpPr/>
+          <p:nvPr/>
+        </p:nvSpPr>
+        <p:spPr>
+          <a:xfrm>
+            <a:off x="457200" y="4754880"/>
+            <a:ext cx="5486400" cy="274320"/>
+          </a:xfrm>
+          <a:prstGeom prst="rect">
+            <a:avLst/>
+          </a:prstGeom>
+          <a:noFill/>
+          <a:ln/>
+        </p:spPr>
+        <p:txBody>
+          <a:bodyPr wrap="square" lIns="0" tIns="0" rIns="0" bIns="0" rtlCol="0" anchor="ctr"/>
+          <a:lstStyle/>
+          <a:p>
+            <a:pPr indent="0" marL="0">
+              <a:buNone/>
+            </a:pPr>
+            <a:r>
+              <a:rPr lang="en-US" sz="900" i="1" dirty="0">
+                <a:solidFill>
+                  <a:srgbClr val="64748B"/>
+                </a:solidFill>
+                <a:latin typeface="Calibri" pitchFamily="34" charset="0"/>
+                <a:ea typeface="Calibri" pitchFamily="34" charset="-122"/>
+                <a:cs typeface="Calibri" pitchFamily="34" charset="-120"/>
+              </a:rPr>
+              <a:t>Three Signals, One Story</a:t>
+            </a:r>
+            <a:endParaRPr lang="en-US" sz="900" dirty="0"/>
+          </a:p>
+        </p:txBody>
+      </p:sp>
+      <p:sp>
+        <p:nvSpPr>
+          <p:cNvPr id="16" name="Text 14"/>
+          <p:cNvSpPr/>
+          <p:nvPr/>
+        </p:nvSpPr>
+        <p:spPr>
+          <a:xfrm>
+            <a:off x="8229600" y="4754880"/>
+            <a:ext cx="457200" cy="274320"/>
+          </a:xfrm>
+          <a:prstGeom prst="rect">
+            <a:avLst/>
+          </a:prstGeom>
+          <a:noFill/>
+          <a:ln/>
+        </p:spPr>
+        <p:txBody>
+          <a:bodyPr wrap="square" lIns="0" tIns="0" rIns="0" bIns="0" rtlCol="0" anchor="ctr"/>
+          <a:lstStyle/>
+          <a:p>
+            <a:pPr algn="r" indent="0" marL="0">
+              <a:buNone/>
+            </a:pPr>
+            <a:r>
+              <a:rPr lang="en-US" sz="900" dirty="0">
+                <a:solidFill>
+                  <a:srgbClr val="64748B"/>
+                </a:solidFill>
+                <a:latin typeface="Calibri" pitchFamily="34" charset="0"/>
+                <a:ea typeface="Calibri" pitchFamily="34" charset="-122"/>
+                <a:cs typeface="Calibri" pitchFamily="34" charset="-120"/>
+              </a:rPr>
+              <a:t>26</a:t>
+            </a:r>
+            <a:endParaRPr lang="en-US" sz="900" dirty="0"/>
+          </a:p>
+        </p:txBody>
+      </p:sp>
+    </p:spTree>
+  </p:cSld>
+  <p:clrMapOvr>
+    <a:masterClrMapping/>
+  </p:clrMapOvr>
+</p:sld>
+</file>
+
+<file path=ppt/slides/slide27.xml><?xml version="1.0" encoding="utf-8"?>
+<p:sld xmlns:a="http://schemas.openxmlformats.org/drawingml/2006/main" xmlns:r="http://schemas.openxmlformats.org/officeDocument/2006/relationships" xmlns:p="http://schemas.openxmlformats.org/presentationml/2006/main">
+  <p:cSld name="Slide 27">
     <p:bg>
       <p:bgPr>
         <a:solidFill>
@@ -11310,714 +12279,6 @@
               <a:t>[Speaker]  ·  [Twitter/X · GitHub · email]</a:t>
             </a:r>
             <a:endParaRPr lang="en-US" sz="1400" dirty="0"/>
-          </a:p>
-        </p:txBody>
-      </p:sp>
-    </p:spTree>
-  </p:cSld>
-  <p:clrMapOvr>
-    <a:masterClrMapping/>
-  </p:clrMapOvr>
-</p:sld>
-</file>
-
-<file path=ppt/slides/slide27.xml><?xml version="1.0" encoding="utf-8"?>
-<p:sld xmlns:a="http://schemas.openxmlformats.org/drawingml/2006/main" xmlns:r="http://schemas.openxmlformats.org/officeDocument/2006/relationships" xmlns:p="http://schemas.openxmlformats.org/presentationml/2006/main">
-  <p:cSld name="Slide 27">
-    <p:bg>
-      <p:bgPr>
-        <a:solidFill>
-          <a:srgbClr val="FFFFFF"/>
-        </a:solidFill>
-      </p:bgPr>
-    </p:bg>
-    <p:spTree>
-      <p:nvGrpSpPr>
-        <p:cNvPr id="1" name=""/>
-        <p:cNvGrpSpPr/>
-        <p:nvPr/>
-      </p:nvGrpSpPr>
-      <p:grpSpPr>
-        <a:xfrm>
-          <a:off x="0" y="0"/>
-          <a:ext cx="0" cy="0"/>
-          <a:chOff x="0" y="0"/>
-          <a:chExt cx="0" cy="0"/>
-        </a:xfrm>
-      </p:grpSpPr>
-      <p:sp>
-        <p:nvSpPr>
-          <p:cNvPr id="2" name="Shape 0"/>
-          <p:cNvSpPr/>
-          <p:nvPr/>
-        </p:nvSpPr>
-        <p:spPr>
-          <a:xfrm>
-            <a:off x="457200" y="457200"/>
-            <a:ext cx="1188720" cy="548640"/>
-          </a:xfrm>
-          <a:prstGeom prst="rect">
-            <a:avLst/>
-          </a:prstGeom>
-          <a:solidFill>
-            <a:srgbClr val="14B8A6"/>
-          </a:solidFill>
-          <a:ln/>
-        </p:spPr>
-      </p:sp>
-      <p:sp>
-        <p:nvSpPr>
-          <p:cNvPr id="3" name="Text 1"/>
-          <p:cNvSpPr/>
-          <p:nvPr/>
-        </p:nvSpPr>
-        <p:spPr>
-          <a:xfrm>
-            <a:off x="457200" y="457200"/>
-            <a:ext cx="1188720" cy="548640"/>
-          </a:xfrm>
-          <a:prstGeom prst="rect">
-            <a:avLst/>
-          </a:prstGeom>
-          <a:noFill/>
-          <a:ln/>
-        </p:spPr>
-        <p:txBody>
-          <a:bodyPr wrap="square" lIns="0" tIns="0" rIns="0" bIns="0" rtlCol="0" anchor="ctr"/>
-          <a:lstStyle/>
-          <a:p>
-            <a:pPr algn="ctr" indent="0" marL="0">
-              <a:buNone/>
-            </a:pPr>
-            <a:r>
-              <a:rPr lang="en-US" sz="1600" b="1" dirty="0">
-                <a:solidFill>
-                  <a:srgbClr val="FFFFFF"/>
-                </a:solidFill>
-                <a:latin typeface="Calibri" pitchFamily="34" charset="0"/>
-                <a:ea typeface="Calibri" pitchFamily="34" charset="-122"/>
-                <a:cs typeface="Calibri" pitchFamily="34" charset="-120"/>
-              </a:rPr>
-              <a:t>Bonus</a:t>
-            </a:r>
-            <a:endParaRPr lang="en-US" sz="1600" dirty="0"/>
-          </a:p>
-        </p:txBody>
-      </p:sp>
-      <p:sp>
-        <p:nvSpPr>
-          <p:cNvPr id="4" name="Text 2"/>
-          <p:cNvSpPr/>
-          <p:nvPr/>
-        </p:nvSpPr>
-        <p:spPr>
-          <a:xfrm>
-            <a:off x="1828800" y="365760"/>
-            <a:ext cx="6858000" cy="731520"/>
-          </a:xfrm>
-          <a:prstGeom prst="rect">
-            <a:avLst/>
-          </a:prstGeom>
-          <a:noFill/>
-          <a:ln/>
-        </p:spPr>
-        <p:txBody>
-          <a:bodyPr wrap="square" lIns="0" tIns="0" rIns="0" bIns="0" rtlCol="0" anchor="ctr"/>
-          <a:lstStyle/>
-          <a:p>
-            <a:pPr indent="0" marL="0">
-              <a:buNone/>
-            </a:pPr>
-            <a:r>
-              <a:rPr lang="en-US" sz="2600" b="1" dirty="0">
-                <a:solidFill>
-                  <a:srgbClr val="0F172A"/>
-                </a:solidFill>
-                <a:latin typeface="Calibri" pitchFamily="34" charset="0"/>
-                <a:ea typeface="Calibri" pitchFamily="34" charset="-122"/>
-                <a:cs typeface="Calibri" pitchFamily="34" charset="-120"/>
-              </a:rPr>
-              <a:t>Shenandoah is one flag away on UBI</a:t>
-            </a:r>
-            <a:endParaRPr lang="en-US" sz="2600" dirty="0"/>
-          </a:p>
-        </p:txBody>
-      </p:sp>
-      <p:sp>
-        <p:nvSpPr>
-          <p:cNvPr id="5" name="Shape 3"/>
-          <p:cNvSpPr/>
-          <p:nvPr/>
-        </p:nvSpPr>
-        <p:spPr>
-          <a:xfrm>
-            <a:off x="457200" y="1371600"/>
-            <a:ext cx="4023360" cy="3200400"/>
-          </a:xfrm>
-          <a:prstGeom prst="rect">
-            <a:avLst/>
-          </a:prstGeom>
-          <a:solidFill>
-            <a:srgbClr val="F8FAFC"/>
-          </a:solidFill>
-          <a:ln/>
-        </p:spPr>
-      </p:sp>
-      <p:sp>
-        <p:nvSpPr>
-          <p:cNvPr id="6" name="Text 4"/>
-          <p:cNvSpPr/>
-          <p:nvPr/>
-        </p:nvSpPr>
-        <p:spPr>
-          <a:xfrm>
-            <a:off x="640080" y="1508760"/>
-            <a:ext cx="3657600" cy="365760"/>
-          </a:xfrm>
-          <a:prstGeom prst="rect">
-            <a:avLst/>
-          </a:prstGeom>
-          <a:noFill/>
-          <a:ln/>
-        </p:spPr>
-        <p:txBody>
-          <a:bodyPr wrap="square" lIns="0" tIns="0" rIns="0" bIns="0" rtlCol="0" anchor="ctr"/>
-          <a:lstStyle/>
-          <a:p>
-            <a:pPr indent="0" marL="0">
-              <a:buNone/>
-            </a:pPr>
-            <a:r>
-              <a:rPr lang="en-US" sz="1600" b="1" dirty="0">
-                <a:solidFill>
-                  <a:srgbClr val="0D9488"/>
-                </a:solidFill>
-                <a:latin typeface="Calibri" pitchFamily="34" charset="0"/>
-                <a:ea typeface="Calibri" pitchFamily="34" charset="-122"/>
-                <a:cs typeface="Calibri" pitchFamily="34" charset="-120"/>
-              </a:rPr>
-              <a:t>The story</a:t>
-            </a:r>
-            <a:endParaRPr lang="en-US" sz="1600" dirty="0"/>
-          </a:p>
-        </p:txBody>
-      </p:sp>
-      <p:sp>
-        <p:nvSpPr>
-          <p:cNvPr id="7" name="Text 5"/>
-          <p:cNvSpPr/>
-          <p:nvPr/>
-        </p:nvSpPr>
-        <p:spPr>
-          <a:xfrm>
-            <a:off x="640080" y="1920240"/>
-            <a:ext cx="3657600" cy="2560320"/>
-          </a:xfrm>
-          <a:prstGeom prst="rect">
-            <a:avLst/>
-          </a:prstGeom>
-          <a:noFill/>
-          <a:ln/>
-        </p:spPr>
-        <p:txBody>
-          <a:bodyPr wrap="square" rtlCol="0" anchor="ctr"/>
-          <a:lstStyle/>
-          <a:p>
-            <a:pPr marL="342900" indent="-342900">
-              <a:spcAft>
-                <a:spcPts val="600"/>
-              </a:spcAft>
-              <a:buSzPct val="100000"/>
-              <a:buChar char="•"/>
-            </a:pPr>
-            <a:r>
-              <a:rPr lang="en-US" sz="1300" dirty="0">
-                <a:solidFill>
-                  <a:srgbClr val="0F172A"/>
-                </a:solidFill>
-                <a:latin typeface="Calibri" pitchFamily="34" charset="0"/>
-                <a:ea typeface="Calibri" pitchFamily="34" charset="-122"/>
-                <a:cs typeface="Calibri" pitchFamily="34" charset="-120"/>
-              </a:rPr>
-              <a:t>Red Hat develops &amp; maintains Shenandoah</a:t>
-            </a:r>
-            <a:endParaRPr lang="en-US" sz="1300" dirty="0"/>
-          </a:p>
-          <a:p>
-            <a:pPr marL="342900" indent="-342900">
-              <a:spcAft>
-                <a:spcPts val="600"/>
-              </a:spcAft>
-              <a:buSzPct val="100000"/>
-              <a:buChar char="•"/>
-            </a:pPr>
-            <a:r>
-              <a:rPr lang="en-US" sz="1300" dirty="0">
-                <a:solidFill>
-                  <a:srgbClr val="0F172A"/>
-                </a:solidFill>
-                <a:latin typeface="Calibri" pitchFamily="34" charset="0"/>
-                <a:ea typeface="Calibri" pitchFamily="34" charset="-122"/>
-                <a:cs typeface="Calibri" pitchFamily="34" charset="-120"/>
-              </a:rPr>
-              <a:t>Generational since JDK 21</a:t>
-            </a:r>
-            <a:endParaRPr lang="en-US" sz="1300" dirty="0"/>
-          </a:p>
-          <a:p>
-            <a:pPr marL="342900" indent="-342900">
-              <a:spcAft>
-                <a:spcPts val="600"/>
-              </a:spcAft>
-              <a:buSzPct val="100000"/>
-              <a:buChar char="•"/>
-            </a:pPr>
-            <a:r>
-              <a:rPr lang="en-US" sz="1300" dirty="0">
-                <a:solidFill>
-                  <a:srgbClr val="0F172A"/>
-                </a:solidFill>
-                <a:latin typeface="Calibri" pitchFamily="34" charset="0"/>
-                <a:ea typeface="Calibri" pitchFamily="34" charset="-122"/>
-                <a:cs typeface="Calibri" pitchFamily="34" charset="-120"/>
-              </a:rPr>
-              <a:t>Sub-10ms pauses on multi-GB heaps</a:t>
-            </a:r>
-            <a:endParaRPr lang="en-US" sz="1300" dirty="0"/>
-          </a:p>
-          <a:p>
-            <a:pPr marL="342900" indent="-342900">
-              <a:spcAft>
-                <a:spcPts val="600"/>
-              </a:spcAft>
-              <a:buSzPct val="100000"/>
-              <a:buChar char="•"/>
-            </a:pPr>
-            <a:r>
-              <a:rPr lang="en-US" sz="1300" dirty="0">
-                <a:solidFill>
-                  <a:srgbClr val="0F172A"/>
-                </a:solidFill>
-                <a:latin typeface="Calibri" pitchFamily="34" charset="0"/>
-                <a:ea typeface="Calibri" pitchFamily="34" charset="-122"/>
-                <a:cs typeface="Calibri" pitchFamily="34" charset="-120"/>
-              </a:rPr>
-              <a:t>Built into UBI9 OpenJDK 21 — already there</a:t>
-            </a:r>
-            <a:endParaRPr lang="en-US" sz="1300" dirty="0"/>
-          </a:p>
-          <a:p>
-            <a:pPr marL="342900" indent="-342900">
-              <a:spcAft>
-                <a:spcPts val="600"/>
-              </a:spcAft>
-              <a:buSzPct val="100000"/>
-              <a:buChar char="•"/>
-            </a:pPr>
-            <a:r>
-              <a:rPr lang="en-US" sz="1300" dirty="0">
-                <a:solidFill>
-                  <a:srgbClr val="0F172A"/>
-                </a:solidFill>
-                <a:latin typeface="Calibri" pitchFamily="34" charset="0"/>
-                <a:ea typeface="Calibri" pitchFamily="34" charset="-122"/>
-                <a:cs typeface="Calibri" pitchFamily="34" charset="-120"/>
-              </a:rPr>
-              <a:t>Default GC on UBI9 is G1 (verified)</a:t>
-            </a:r>
-            <a:endParaRPr lang="en-US" sz="1300" dirty="0"/>
-          </a:p>
-          <a:p>
-            <a:pPr marL="342900" indent="-342900">
-              <a:spcAft>
-                <a:spcPts val="600"/>
-              </a:spcAft>
-              <a:buSzPct val="100000"/>
-              <a:buChar char="•"/>
-            </a:pPr>
-            <a:r>
-              <a:rPr lang="en-US" sz="1300" dirty="0">
-                <a:solidFill>
-                  <a:srgbClr val="0F172A"/>
-                </a:solidFill>
-                <a:latin typeface="Calibri" pitchFamily="34" charset="0"/>
-                <a:ea typeface="Calibri" pitchFamily="34" charset="-122"/>
-                <a:cs typeface="Calibri" pitchFamily="34" charset="-120"/>
-              </a:rPr>
-              <a:t>Switch with one JVM flag, no rebuild</a:t>
-            </a:r>
-            <a:endParaRPr lang="en-US" sz="1300" dirty="0"/>
-          </a:p>
-        </p:txBody>
-      </p:sp>
-      <p:sp>
-        <p:nvSpPr>
-          <p:cNvPr id="8" name="Shape 6"/>
-          <p:cNvSpPr/>
-          <p:nvPr/>
-        </p:nvSpPr>
-        <p:spPr>
-          <a:xfrm>
-            <a:off x="4663440" y="1371600"/>
-            <a:ext cx="4023360" cy="3200400"/>
-          </a:xfrm>
-          <a:prstGeom prst="rect">
-            <a:avLst/>
-          </a:prstGeom>
-          <a:solidFill>
-            <a:srgbClr val="0F172A"/>
-          </a:solidFill>
-          <a:ln/>
-        </p:spPr>
-      </p:sp>
-      <p:sp>
-        <p:nvSpPr>
-          <p:cNvPr id="9" name="Text 7"/>
-          <p:cNvSpPr/>
-          <p:nvPr/>
-        </p:nvSpPr>
-        <p:spPr>
-          <a:xfrm>
-            <a:off x="4846320" y="1508760"/>
-            <a:ext cx="3657600" cy="365760"/>
-          </a:xfrm>
-          <a:prstGeom prst="rect">
-            <a:avLst/>
-          </a:prstGeom>
-          <a:noFill/>
-          <a:ln/>
-        </p:spPr>
-        <p:txBody>
-          <a:bodyPr wrap="square" lIns="0" tIns="0" rIns="0" bIns="0" rtlCol="0" anchor="ctr"/>
-          <a:lstStyle/>
-          <a:p>
-            <a:pPr indent="0" marL="0">
-              <a:buNone/>
-            </a:pPr>
-            <a:r>
-              <a:rPr lang="en-US" sz="1600" b="1" dirty="0">
-                <a:solidFill>
-                  <a:srgbClr val="14B8A6"/>
-                </a:solidFill>
-                <a:latin typeface="Calibri" pitchFamily="34" charset="0"/>
-                <a:ea typeface="Calibri" pitchFamily="34" charset="-122"/>
-                <a:cs typeface="Calibri" pitchFamily="34" charset="-120"/>
-              </a:rPr>
-              <a:t>How</a:t>
-            </a:r>
-            <a:endParaRPr lang="en-US" sz="1600" dirty="0"/>
-          </a:p>
-        </p:txBody>
-      </p:sp>
-      <p:sp>
-        <p:nvSpPr>
-          <p:cNvPr id="10" name="Text 8"/>
-          <p:cNvSpPr/>
-          <p:nvPr/>
-        </p:nvSpPr>
-        <p:spPr>
-          <a:xfrm>
-            <a:off x="4846320" y="1965960"/>
-            <a:ext cx="3657600" cy="274320"/>
-          </a:xfrm>
-          <a:prstGeom prst="rect">
-            <a:avLst/>
-          </a:prstGeom>
-          <a:noFill/>
-          <a:ln/>
-        </p:spPr>
-        <p:txBody>
-          <a:bodyPr wrap="square" lIns="0" tIns="0" rIns="0" bIns="0" rtlCol="0" anchor="ctr"/>
-          <a:lstStyle/>
-          <a:p>
-            <a:pPr indent="0" marL="0">
-              <a:buNone/>
-            </a:pPr>
-            <a:r>
-              <a:rPr lang="en-US" sz="1100" dirty="0">
-                <a:solidFill>
-                  <a:srgbClr val="64748B"/>
-                </a:solidFill>
-                <a:latin typeface="Consolas" pitchFamily="34" charset="0"/>
-                <a:ea typeface="Consolas" pitchFamily="34" charset="-122"/>
-                <a:cs typeface="Consolas" pitchFamily="34" charset="-120"/>
-              </a:rPr>
-              <a:t># Shenandoah</a:t>
-            </a:r>
-            <a:endParaRPr lang="en-US" sz="1100" dirty="0"/>
-          </a:p>
-        </p:txBody>
-      </p:sp>
-      <p:sp>
-        <p:nvSpPr>
-          <p:cNvPr id="11" name="Text 9"/>
-          <p:cNvSpPr/>
-          <p:nvPr/>
-        </p:nvSpPr>
-        <p:spPr>
-          <a:xfrm>
-            <a:off x="4846320" y="2240280"/>
-            <a:ext cx="3657600" cy="365760"/>
-          </a:xfrm>
-          <a:prstGeom prst="rect">
-            <a:avLst/>
-          </a:prstGeom>
-          <a:noFill/>
-          <a:ln/>
-        </p:spPr>
-        <p:txBody>
-          <a:bodyPr wrap="square" lIns="0" tIns="0" rIns="0" bIns="0" rtlCol="0" anchor="ctr"/>
-          <a:lstStyle/>
-          <a:p>
-            <a:pPr indent="0" marL="0">
-              <a:buNone/>
-            </a:pPr>
-            <a:r>
-              <a:rPr lang="en-US" sz="1400" dirty="0">
-                <a:solidFill>
-                  <a:srgbClr val="14B8A6"/>
-                </a:solidFill>
-                <a:latin typeface="Consolas" pitchFamily="34" charset="0"/>
-                <a:ea typeface="Consolas" pitchFamily="34" charset="-122"/>
-                <a:cs typeface="Consolas" pitchFamily="34" charset="-120"/>
-              </a:rPr>
-              <a:t>-XX:+UseShenandoahGC</a:t>
-            </a:r>
-            <a:endParaRPr lang="en-US" sz="1400" dirty="0"/>
-          </a:p>
-        </p:txBody>
-      </p:sp>
-      <p:sp>
-        <p:nvSpPr>
-          <p:cNvPr id="12" name="Text 10"/>
-          <p:cNvSpPr/>
-          <p:nvPr/>
-        </p:nvSpPr>
-        <p:spPr>
-          <a:xfrm>
-            <a:off x="4846320" y="2788920"/>
-            <a:ext cx="3657600" cy="274320"/>
-          </a:xfrm>
-          <a:prstGeom prst="rect">
-            <a:avLst/>
-          </a:prstGeom>
-          <a:noFill/>
-          <a:ln/>
-        </p:spPr>
-        <p:txBody>
-          <a:bodyPr wrap="square" lIns="0" tIns="0" rIns="0" bIns="0" rtlCol="0" anchor="ctr"/>
-          <a:lstStyle/>
-          <a:p>
-            <a:pPr indent="0" marL="0">
-              <a:buNone/>
-            </a:pPr>
-            <a:r>
-              <a:rPr lang="en-US" sz="1100" dirty="0">
-                <a:solidFill>
-                  <a:srgbClr val="64748B"/>
-                </a:solidFill>
-                <a:latin typeface="Consolas" pitchFamily="34" charset="0"/>
-                <a:ea typeface="Consolas" pitchFamily="34" charset="-122"/>
-                <a:cs typeface="Consolas" pitchFamily="34" charset="-120"/>
-              </a:rPr>
-              <a:t># G1 (default)</a:t>
-            </a:r>
-            <a:endParaRPr lang="en-US" sz="1100" dirty="0"/>
-          </a:p>
-        </p:txBody>
-      </p:sp>
-      <p:sp>
-        <p:nvSpPr>
-          <p:cNvPr id="13" name="Text 11"/>
-          <p:cNvSpPr/>
-          <p:nvPr/>
-        </p:nvSpPr>
-        <p:spPr>
-          <a:xfrm>
-            <a:off x="4846320" y="3063240"/>
-            <a:ext cx="3657600" cy="365760"/>
-          </a:xfrm>
-          <a:prstGeom prst="rect">
-            <a:avLst/>
-          </a:prstGeom>
-          <a:noFill/>
-          <a:ln/>
-        </p:spPr>
-        <p:txBody>
-          <a:bodyPr wrap="square" lIns="0" tIns="0" rIns="0" bIns="0" rtlCol="0" anchor="ctr"/>
-          <a:lstStyle/>
-          <a:p>
-            <a:pPr indent="0" marL="0">
-              <a:buNone/>
-            </a:pPr>
-            <a:r>
-              <a:rPr lang="en-US" sz="1400" dirty="0">
-                <a:solidFill>
-                  <a:srgbClr val="F8FAFC"/>
-                </a:solidFill>
-                <a:latin typeface="Consolas" pitchFamily="34" charset="0"/>
-                <a:ea typeface="Consolas" pitchFamily="34" charset="-122"/>
-                <a:cs typeface="Consolas" pitchFamily="34" charset="-120"/>
-              </a:rPr>
-              <a:t>-XX:+UseG1GC</a:t>
-            </a:r>
-            <a:endParaRPr lang="en-US" sz="1400" dirty="0"/>
-          </a:p>
-        </p:txBody>
-      </p:sp>
-      <p:sp>
-        <p:nvSpPr>
-          <p:cNvPr id="14" name="Text 12"/>
-          <p:cNvSpPr/>
-          <p:nvPr/>
-        </p:nvSpPr>
-        <p:spPr>
-          <a:xfrm>
-            <a:off x="4846320" y="3611880"/>
-            <a:ext cx="3657600" cy="274320"/>
-          </a:xfrm>
-          <a:prstGeom prst="rect">
-            <a:avLst/>
-          </a:prstGeom>
-          <a:noFill/>
-          <a:ln/>
-        </p:spPr>
-        <p:txBody>
-          <a:bodyPr wrap="square" lIns="0" tIns="0" rIns="0" bIns="0" rtlCol="0" anchor="ctr"/>
-          <a:lstStyle/>
-          <a:p>
-            <a:pPr indent="0" marL="0">
-              <a:buNone/>
-            </a:pPr>
-            <a:r>
-              <a:rPr lang="en-US" sz="1100" dirty="0">
-                <a:solidFill>
-                  <a:srgbClr val="64748B"/>
-                </a:solidFill>
-                <a:latin typeface="Consolas" pitchFamily="34" charset="0"/>
-                <a:ea typeface="Consolas" pitchFamily="34" charset="-122"/>
-                <a:cs typeface="Consolas" pitchFamily="34" charset="-120"/>
-              </a:rPr>
-              <a:t># ZGC (low-pause alt)</a:t>
-            </a:r>
-            <a:endParaRPr lang="en-US" sz="1100" dirty="0"/>
-          </a:p>
-        </p:txBody>
-      </p:sp>
-      <p:sp>
-        <p:nvSpPr>
-          <p:cNvPr id="15" name="Text 13"/>
-          <p:cNvSpPr/>
-          <p:nvPr/>
-        </p:nvSpPr>
-        <p:spPr>
-          <a:xfrm>
-            <a:off x="4846320" y="3886200"/>
-            <a:ext cx="3657600" cy="365760"/>
-          </a:xfrm>
-          <a:prstGeom prst="rect">
-            <a:avLst/>
-          </a:prstGeom>
-          <a:noFill/>
-          <a:ln/>
-        </p:spPr>
-        <p:txBody>
-          <a:bodyPr wrap="square" lIns="0" tIns="0" rIns="0" bIns="0" rtlCol="0" anchor="ctr"/>
-          <a:lstStyle/>
-          <a:p>
-            <a:pPr indent="0" marL="0">
-              <a:buNone/>
-            </a:pPr>
-            <a:r>
-              <a:rPr lang="en-US" sz="1400" dirty="0">
-                <a:solidFill>
-                  <a:srgbClr val="F8FAFC"/>
-                </a:solidFill>
-                <a:latin typeface="Consolas" pitchFamily="34" charset="0"/>
-                <a:ea typeface="Consolas" pitchFamily="34" charset="-122"/>
-                <a:cs typeface="Consolas" pitchFamily="34" charset="-120"/>
-              </a:rPr>
-              <a:t>-XX:+UseZGC</a:t>
-            </a:r>
-            <a:endParaRPr lang="en-US" sz="1400" dirty="0"/>
-          </a:p>
-        </p:txBody>
-      </p:sp>
-      <p:sp>
-        <p:nvSpPr>
-          <p:cNvPr id="16" name="Text 14"/>
-          <p:cNvSpPr/>
-          <p:nvPr/>
-        </p:nvSpPr>
-        <p:spPr>
-          <a:xfrm>
-            <a:off x="457200" y="4754880"/>
-            <a:ext cx="5486400" cy="274320"/>
-          </a:xfrm>
-          <a:prstGeom prst="rect">
-            <a:avLst/>
-          </a:prstGeom>
-          <a:noFill/>
-          <a:ln/>
-        </p:spPr>
-        <p:txBody>
-          <a:bodyPr wrap="square" lIns="0" tIns="0" rIns="0" bIns="0" rtlCol="0" anchor="ctr"/>
-          <a:lstStyle/>
-          <a:p>
-            <a:pPr indent="0" marL="0">
-              <a:buNone/>
-            </a:pPr>
-            <a:r>
-              <a:rPr lang="en-US" sz="900" i="1" dirty="0">
-                <a:solidFill>
-                  <a:srgbClr val="64748B"/>
-                </a:solidFill>
-                <a:latin typeface="Calibri" pitchFamily="34" charset="0"/>
-                <a:ea typeface="Calibri" pitchFamily="34" charset="-122"/>
-                <a:cs typeface="Calibri" pitchFamily="34" charset="-120"/>
-              </a:rPr>
-              <a:t>Three Signals, One Story</a:t>
-            </a:r>
-            <a:endParaRPr lang="en-US" sz="900" dirty="0"/>
-          </a:p>
-        </p:txBody>
-      </p:sp>
-      <p:sp>
-        <p:nvSpPr>
-          <p:cNvPr id="17" name="Text 15"/>
-          <p:cNvSpPr/>
-          <p:nvPr/>
-        </p:nvSpPr>
-        <p:spPr>
-          <a:xfrm>
-            <a:off x="8229600" y="4754880"/>
-            <a:ext cx="457200" cy="274320"/>
-          </a:xfrm>
-          <a:prstGeom prst="rect">
-            <a:avLst/>
-          </a:prstGeom>
-          <a:noFill/>
-          <a:ln/>
-        </p:spPr>
-        <p:txBody>
-          <a:bodyPr wrap="square" lIns="0" tIns="0" rIns="0" bIns="0" rtlCol="0" anchor="ctr"/>
-          <a:lstStyle/>
-          <a:p>
-            <a:pPr algn="r" indent="0" marL="0">
-              <a:buNone/>
-            </a:pPr>
-            <a:r>
-              <a:rPr lang="en-US" sz="900" dirty="0">
-                <a:solidFill>
-                  <a:srgbClr val="64748B"/>
-                </a:solidFill>
-                <a:latin typeface="Calibri" pitchFamily="34" charset="0"/>
-                <a:ea typeface="Calibri" pitchFamily="34" charset="-122"/>
-                <a:cs typeface="Calibri" pitchFamily="34" charset="-120"/>
-              </a:rPr>
-              <a:t>27</a:t>
-            </a:r>
-            <a:endParaRPr lang="en-US" sz="900" dirty="0"/>
           </a:p>
         </p:txBody>
       </p:sp>
@@ -12145,7 +12406,7 @@
                 <a:ea typeface="Calibri" pitchFamily="34" charset="-122"/>
                 <a:cs typeface="Calibri" pitchFamily="34" charset="-120"/>
               </a:rPr>
-              <a:t>Reproduce on your laptop</a:t>
+              <a:t>Shenandoah is one flag away on UBI</a:t>
             </a:r>
             <a:endParaRPr lang="en-US" sz="2600" dirty="0"/>
           </a:p>
@@ -12160,7 +12421,214 @@
         <p:spPr>
           <a:xfrm>
             <a:off x="457200" y="1371600"/>
-            <a:ext cx="8229600" cy="3200400"/>
+            <a:ext cx="4023360" cy="3200400"/>
+          </a:xfrm>
+          <a:prstGeom prst="rect">
+            <a:avLst/>
+          </a:prstGeom>
+          <a:solidFill>
+            <a:srgbClr val="F8FAFC"/>
+          </a:solidFill>
+          <a:ln/>
+        </p:spPr>
+      </p:sp>
+      <p:sp>
+        <p:nvSpPr>
+          <p:cNvPr id="6" name="Text 4"/>
+          <p:cNvSpPr/>
+          <p:nvPr/>
+        </p:nvSpPr>
+        <p:spPr>
+          <a:xfrm>
+            <a:off x="640080" y="1508760"/>
+            <a:ext cx="3657600" cy="365760"/>
+          </a:xfrm>
+          <a:prstGeom prst="rect">
+            <a:avLst/>
+          </a:prstGeom>
+          <a:noFill/>
+          <a:ln/>
+        </p:spPr>
+        <p:txBody>
+          <a:bodyPr wrap="square" lIns="0" tIns="0" rIns="0" bIns="0" rtlCol="0" anchor="ctr"/>
+          <a:lstStyle/>
+          <a:p>
+            <a:pPr indent="0" marL="0">
+              <a:buNone/>
+            </a:pPr>
+            <a:r>
+              <a:rPr lang="en-US" sz="1600" b="1" dirty="0">
+                <a:solidFill>
+                  <a:srgbClr val="0D9488"/>
+                </a:solidFill>
+                <a:latin typeface="Calibri" pitchFamily="34" charset="0"/>
+                <a:ea typeface="Calibri" pitchFamily="34" charset="-122"/>
+                <a:cs typeface="Calibri" pitchFamily="34" charset="-120"/>
+              </a:rPr>
+              <a:t>The story</a:t>
+            </a:r>
+            <a:endParaRPr lang="en-US" sz="1600" dirty="0"/>
+          </a:p>
+        </p:txBody>
+      </p:sp>
+      <p:sp>
+        <p:nvSpPr>
+          <p:cNvPr id="7" name="Text 5"/>
+          <p:cNvSpPr/>
+          <p:nvPr/>
+        </p:nvSpPr>
+        <p:spPr>
+          <a:xfrm>
+            <a:off x="640080" y="1920240"/>
+            <a:ext cx="3657600" cy="2560320"/>
+          </a:xfrm>
+          <a:prstGeom prst="rect">
+            <a:avLst/>
+          </a:prstGeom>
+          <a:noFill/>
+          <a:ln/>
+        </p:spPr>
+        <p:txBody>
+          <a:bodyPr wrap="square" rtlCol="0" anchor="ctr"/>
+          <a:lstStyle/>
+          <a:p>
+            <a:pPr marL="342900" indent="-342900">
+              <a:spcAft>
+                <a:spcPts val="600"/>
+              </a:spcAft>
+              <a:buSzPct val="100000"/>
+              <a:buChar char="•"/>
+            </a:pPr>
+            <a:r>
+              <a:rPr lang="en-US" sz="1300" dirty="0">
+                <a:solidFill>
+                  <a:srgbClr val="0F172A"/>
+                </a:solidFill>
+                <a:latin typeface="Calibri" pitchFamily="34" charset="0"/>
+                <a:ea typeface="Calibri" pitchFamily="34" charset="-122"/>
+                <a:cs typeface="Calibri" pitchFamily="34" charset="-120"/>
+              </a:rPr>
+              <a:t>Red Hat develops &amp; maintains Shenandoah</a:t>
+            </a:r>
+            <a:endParaRPr lang="en-US" sz="1300" dirty="0"/>
+          </a:p>
+          <a:p>
+            <a:pPr marL="342900" indent="-342900">
+              <a:spcAft>
+                <a:spcPts val="600"/>
+              </a:spcAft>
+              <a:buSzPct val="100000"/>
+              <a:buChar char="•"/>
+            </a:pPr>
+            <a:r>
+              <a:rPr lang="en-US" sz="1300" dirty="0">
+                <a:solidFill>
+                  <a:srgbClr val="0F172A"/>
+                </a:solidFill>
+                <a:latin typeface="Calibri" pitchFamily="34" charset="0"/>
+                <a:ea typeface="Calibri" pitchFamily="34" charset="-122"/>
+                <a:cs typeface="Calibri" pitchFamily="34" charset="-120"/>
+              </a:rPr>
+              <a:t>Generational since JDK 21</a:t>
+            </a:r>
+            <a:endParaRPr lang="en-US" sz="1300" dirty="0"/>
+          </a:p>
+          <a:p>
+            <a:pPr marL="342900" indent="-342900">
+              <a:spcAft>
+                <a:spcPts val="600"/>
+              </a:spcAft>
+              <a:buSzPct val="100000"/>
+              <a:buChar char="•"/>
+            </a:pPr>
+            <a:r>
+              <a:rPr lang="en-US" sz="1300" dirty="0">
+                <a:solidFill>
+                  <a:srgbClr val="0F172A"/>
+                </a:solidFill>
+                <a:latin typeface="Calibri" pitchFamily="34" charset="0"/>
+                <a:ea typeface="Calibri" pitchFamily="34" charset="-122"/>
+                <a:cs typeface="Calibri" pitchFamily="34" charset="-120"/>
+              </a:rPr>
+              <a:t>Sub-10ms pauses on multi-GB heaps</a:t>
+            </a:r>
+            <a:endParaRPr lang="en-US" sz="1300" dirty="0"/>
+          </a:p>
+          <a:p>
+            <a:pPr marL="342900" indent="-342900">
+              <a:spcAft>
+                <a:spcPts val="600"/>
+              </a:spcAft>
+              <a:buSzPct val="100000"/>
+              <a:buChar char="•"/>
+            </a:pPr>
+            <a:r>
+              <a:rPr lang="en-US" sz="1300" dirty="0">
+                <a:solidFill>
+                  <a:srgbClr val="0F172A"/>
+                </a:solidFill>
+                <a:latin typeface="Calibri" pitchFamily="34" charset="0"/>
+                <a:ea typeface="Calibri" pitchFamily="34" charset="-122"/>
+                <a:cs typeface="Calibri" pitchFamily="34" charset="-120"/>
+              </a:rPr>
+              <a:t>Built into UBI9 OpenJDK — already there</a:t>
+            </a:r>
+            <a:endParaRPr lang="en-US" sz="1300" dirty="0"/>
+          </a:p>
+          <a:p>
+            <a:pPr marL="342900" indent="-342900">
+              <a:spcAft>
+                <a:spcPts val="600"/>
+              </a:spcAft>
+              <a:buSzPct val="100000"/>
+              <a:buChar char="•"/>
+            </a:pPr>
+            <a:r>
+              <a:rPr lang="en-US" sz="1300" dirty="0">
+                <a:solidFill>
+                  <a:srgbClr val="0F172A"/>
+                </a:solidFill>
+                <a:latin typeface="Calibri" pitchFamily="34" charset="0"/>
+                <a:ea typeface="Calibri" pitchFamily="34" charset="-122"/>
+                <a:cs typeface="Calibri" pitchFamily="34" charset="-120"/>
+              </a:rPr>
+              <a:t>JVM ergonomically picks G1 (we verified)</a:t>
+            </a:r>
+            <a:endParaRPr lang="en-US" sz="1300" dirty="0"/>
+          </a:p>
+          <a:p>
+            <a:pPr marL="342900" indent="-342900">
+              <a:spcAft>
+                <a:spcPts val="600"/>
+              </a:spcAft>
+              <a:buSzPct val="100000"/>
+              <a:buChar char="•"/>
+            </a:pPr>
+            <a:r>
+              <a:rPr lang="en-US" sz="1300" dirty="0">
+                <a:solidFill>
+                  <a:srgbClr val="0F172A"/>
+                </a:solidFill>
+                <a:latin typeface="Calibri" pitchFamily="34" charset="0"/>
+                <a:ea typeface="Calibri" pitchFamily="34" charset="-122"/>
+                <a:cs typeface="Calibri" pitchFamily="34" charset="-120"/>
+              </a:rPr>
+              <a:t>Switch with one JVM flag, no rebuild</a:t>
+            </a:r>
+            <a:endParaRPr lang="en-US" sz="1300" dirty="0"/>
+          </a:p>
+        </p:txBody>
+      </p:sp>
+      <p:sp>
+        <p:nvSpPr>
+          <p:cNvPr id="8" name="Shape 6"/>
+          <p:cNvSpPr/>
+          <p:nvPr/>
+        </p:nvSpPr>
+        <p:spPr>
+          <a:xfrm>
+            <a:off x="4663440" y="1371600"/>
+            <a:ext cx="4023360" cy="3200400"/>
           </a:xfrm>
           <a:prstGeom prst="rect">
             <a:avLst/>
@@ -12173,87 +12641,186 @@
       </p:sp>
       <p:sp>
         <p:nvSpPr>
-          <p:cNvPr id="6" name="Text 4"/>
-          <p:cNvSpPr/>
-          <p:nvPr/>
-        </p:nvSpPr>
-        <p:spPr>
-          <a:xfrm>
-            <a:off x="731520" y="1508760"/>
-            <a:ext cx="7680960" cy="2926080"/>
-          </a:xfrm>
-          <a:prstGeom prst="rect">
-            <a:avLst/>
-          </a:prstGeom>
-          <a:noFill/>
-          <a:ln/>
-        </p:spPr>
-        <p:txBody>
-          <a:bodyPr wrap="square" rtlCol="0" anchor="ctr"/>
-          <a:lstStyle/>
-          <a:p>
-            <a:pPr indent="0" marL="0">
-              <a:buNone/>
-            </a:pPr>
-            <a:r>
-              <a:rPr lang="en-US" sz="1300" i="1" dirty="0">
+          <p:cNvPr id="9" name="Text 7"/>
+          <p:cNvSpPr/>
+          <p:nvPr/>
+        </p:nvSpPr>
+        <p:spPr>
+          <a:xfrm>
+            <a:off x="4846320" y="1508760"/>
+            <a:ext cx="3657600" cy="365760"/>
+          </a:xfrm>
+          <a:prstGeom prst="rect">
+            <a:avLst/>
+          </a:prstGeom>
+          <a:noFill/>
+          <a:ln/>
+        </p:spPr>
+        <p:txBody>
+          <a:bodyPr wrap="square" lIns="0" tIns="0" rIns="0" bIns="0" rtlCol="0" anchor="ctr"/>
+          <a:lstStyle/>
+          <a:p>
+            <a:pPr indent="0" marL="0">
+              <a:buNone/>
+            </a:pPr>
+            <a:r>
+              <a:rPr lang="en-US" sz="1600" b="1" dirty="0">
                 <a:solidFill>
                   <a:srgbClr val="14B8A6"/>
+                </a:solidFill>
+                <a:latin typeface="Calibri" pitchFamily="34" charset="0"/>
+                <a:ea typeface="Calibri" pitchFamily="34" charset="-122"/>
+                <a:cs typeface="Calibri" pitchFamily="34" charset="-120"/>
+              </a:rPr>
+              <a:t>How</a:t>
+            </a:r>
+            <a:endParaRPr lang="en-US" sz="1600" dirty="0"/>
+          </a:p>
+        </p:txBody>
+      </p:sp>
+      <p:sp>
+        <p:nvSpPr>
+          <p:cNvPr id="10" name="Text 8"/>
+          <p:cNvSpPr/>
+          <p:nvPr/>
+        </p:nvSpPr>
+        <p:spPr>
+          <a:xfrm>
+            <a:off x="4846320" y="1965960"/>
+            <a:ext cx="3657600" cy="274320"/>
+          </a:xfrm>
+          <a:prstGeom prst="rect">
+            <a:avLst/>
+          </a:prstGeom>
+          <a:noFill/>
+          <a:ln/>
+        </p:spPr>
+        <p:txBody>
+          <a:bodyPr wrap="square" lIns="0" tIns="0" rIns="0" bIns="0" rtlCol="0" anchor="ctr"/>
+          <a:lstStyle/>
+          <a:p>
+            <a:pPr indent="0" marL="0">
+              <a:buNone/>
+            </a:pPr>
+            <a:r>
+              <a:rPr lang="en-US" sz="1100" dirty="0">
+                <a:solidFill>
+                  <a:srgbClr val="64748B"/>
                 </a:solidFill>
                 <a:latin typeface="Consolas" pitchFamily="34" charset="0"/>
                 <a:ea typeface="Consolas" pitchFamily="34" charset="-122"/>
                 <a:cs typeface="Consolas" pitchFamily="34" charset="-120"/>
               </a:rPr>
-              <a:t># Prereqs</a:t>
-            </a:r>
-            <a:endParaRPr lang="en-US" sz="1300" dirty="0"/>
-          </a:p>
-          <a:p>
-            <a:pPr indent="0" marL="0">
-              <a:buNone/>
-            </a:pPr>
-            <a:r>
-              <a:rPr lang="en-US" sz="1300" dirty="0">
-                <a:solidFill>
-                  <a:srgbClr val="F8FAFC"/>
+              <a:t># Shenandoah</a:t>
+            </a:r>
+            <a:endParaRPr lang="en-US" sz="1100" dirty="0"/>
+          </a:p>
+        </p:txBody>
+      </p:sp>
+      <p:sp>
+        <p:nvSpPr>
+          <p:cNvPr id="11" name="Text 9"/>
+          <p:cNvSpPr/>
+          <p:nvPr/>
+        </p:nvSpPr>
+        <p:spPr>
+          <a:xfrm>
+            <a:off x="4846320" y="2240280"/>
+            <a:ext cx="3657600" cy="365760"/>
+          </a:xfrm>
+          <a:prstGeom prst="rect">
+            <a:avLst/>
+          </a:prstGeom>
+          <a:noFill/>
+          <a:ln/>
+        </p:spPr>
+        <p:txBody>
+          <a:bodyPr wrap="square" lIns="0" tIns="0" rIns="0" bIns="0" rtlCol="0" anchor="ctr"/>
+          <a:lstStyle/>
+          <a:p>
+            <a:pPr indent="0" marL="0">
+              <a:buNone/>
+            </a:pPr>
+            <a:r>
+              <a:rPr lang="en-US" sz="1400" dirty="0">
+                <a:solidFill>
+                  <a:srgbClr val="14B8A6"/>
                 </a:solidFill>
                 <a:latin typeface="Consolas" pitchFamily="34" charset="0"/>
                 <a:ea typeface="Consolas" pitchFamily="34" charset="-122"/>
                 <a:cs typeface="Consolas" pitchFamily="34" charset="-120"/>
               </a:rPr>
-              <a:t>Fedora 43+ / Ubuntu 24+, podman 5.x, JDK 25 (Temurin)</a:t>
-            </a:r>
-            <a:endParaRPr lang="en-US" sz="1300" dirty="0"/>
-          </a:p>
-          <a:p>
-            <a:pPr indent="0" marL="0">
-              <a:buNone/>
-            </a:pPr>
-            <a:endParaRPr lang="en-US" sz="1300" dirty="0"/>
-          </a:p>
-          <a:p>
-            <a:pPr indent="0" marL="0">
-              <a:buNone/>
-            </a:pPr>
-            <a:r>
-              <a:rPr lang="en-US" sz="1300" dirty="0">
-                <a:solidFill>
-                  <a:srgbClr val="F8FAFC"/>
+              <a:t>-XX:+UseShenandoahGC</a:t>
+            </a:r>
+            <a:endParaRPr lang="en-US" sz="1400" dirty="0"/>
+          </a:p>
+        </p:txBody>
+      </p:sp>
+      <p:sp>
+        <p:nvSpPr>
+          <p:cNvPr id="12" name="Text 10"/>
+          <p:cNvSpPr/>
+          <p:nvPr/>
+        </p:nvSpPr>
+        <p:spPr>
+          <a:xfrm>
+            <a:off x="4846320" y="2788920"/>
+            <a:ext cx="3657600" cy="274320"/>
+          </a:xfrm>
+          <a:prstGeom prst="rect">
+            <a:avLst/>
+          </a:prstGeom>
+          <a:noFill/>
+          <a:ln/>
+        </p:spPr>
+        <p:txBody>
+          <a:bodyPr wrap="square" lIns="0" tIns="0" rIns="0" bIns="0" rtlCol="0" anchor="ctr"/>
+          <a:lstStyle/>
+          <a:p>
+            <a:pPr indent="0" marL="0">
+              <a:buNone/>
+            </a:pPr>
+            <a:r>
+              <a:rPr lang="en-US" sz="1100" dirty="0">
+                <a:solidFill>
+                  <a:srgbClr val="64748B"/>
                 </a:solidFill>
                 <a:latin typeface="Consolas" pitchFamily="34" charset="0"/>
                 <a:ea typeface="Consolas" pitchFamily="34" charset="-122"/>
                 <a:cs typeface="Consolas" pitchFamily="34" charset="-120"/>
               </a:rPr>
-              <a:t>git clone github.com/patterncatalyst/otel-observability-demos</a:t>
-            </a:r>
-            <a:endParaRPr lang="en-US" sz="1300" dirty="0"/>
-          </a:p>
-          <a:p>
-            <a:pPr indent="0" marL="0">
-              <a:buNone/>
-            </a:pPr>
-            <a:r>
-              <a:rPr lang="en-US" sz="1300" dirty="0">
+              <a:t># G1 (default)</a:t>
+            </a:r>
+            <a:endParaRPr lang="en-US" sz="1100" dirty="0"/>
+          </a:p>
+        </p:txBody>
+      </p:sp>
+      <p:sp>
+        <p:nvSpPr>
+          <p:cNvPr id="13" name="Text 11"/>
+          <p:cNvSpPr/>
+          <p:nvPr/>
+        </p:nvSpPr>
+        <p:spPr>
+          <a:xfrm>
+            <a:off x="4846320" y="3063240"/>
+            <a:ext cx="3657600" cy="365760"/>
+          </a:xfrm>
+          <a:prstGeom prst="rect">
+            <a:avLst/>
+          </a:prstGeom>
+          <a:noFill/>
+          <a:ln/>
+        </p:spPr>
+        <p:txBody>
+          <a:bodyPr wrap="square" lIns="0" tIns="0" rIns="0" bIns="0" rtlCol="0" anchor="ctr"/>
+          <a:lstStyle/>
+          <a:p>
+            <a:pPr indent="0" marL="0">
+              <a:buNone/>
+            </a:pPr>
+            <a:r>
+              <a:rPr lang="en-US" sz="1400" dirty="0">
                 <a:solidFill>
                   <a:srgbClr val="F8FAFC"/>
                 </a:solidFill>
@@ -12261,39 +12828,77 @@
                 <a:ea typeface="Consolas" pitchFamily="34" charset="-122"/>
                 <a:cs typeface="Consolas" pitchFamily="34" charset="-120"/>
               </a:rPr>
-              <a:t>cd otel-observability-demos</a:t>
-            </a:r>
-            <a:endParaRPr lang="en-US" sz="1300" dirty="0"/>
-          </a:p>
-          <a:p>
-            <a:pPr indent="0" marL="0">
-              <a:buNone/>
-            </a:pPr>
-            <a:endParaRPr lang="en-US" sz="1300" dirty="0"/>
-          </a:p>
-          <a:p>
-            <a:pPr indent="0" marL="0">
-              <a:buNone/>
-            </a:pPr>
-            <a:r>
-              <a:rPr lang="en-US" sz="1300" i="1" dirty="0">
-                <a:solidFill>
-                  <a:srgbClr val="14B8A6"/>
+              <a:t>-XX:+UseG1GC</a:t>
+            </a:r>
+            <a:endParaRPr lang="en-US" sz="1400" dirty="0"/>
+          </a:p>
+        </p:txBody>
+      </p:sp>
+      <p:sp>
+        <p:nvSpPr>
+          <p:cNvPr id="14" name="Text 12"/>
+          <p:cNvSpPr/>
+          <p:nvPr/>
+        </p:nvSpPr>
+        <p:spPr>
+          <a:xfrm>
+            <a:off x="4846320" y="3611880"/>
+            <a:ext cx="3657600" cy="274320"/>
+          </a:xfrm>
+          <a:prstGeom prst="rect">
+            <a:avLst/>
+          </a:prstGeom>
+          <a:noFill/>
+          <a:ln/>
+        </p:spPr>
+        <p:txBody>
+          <a:bodyPr wrap="square" lIns="0" tIns="0" rIns="0" bIns="0" rtlCol="0" anchor="ctr"/>
+          <a:lstStyle/>
+          <a:p>
+            <a:pPr indent="0" marL="0">
+              <a:buNone/>
+            </a:pPr>
+            <a:r>
+              <a:rPr lang="en-US" sz="1100" dirty="0">
+                <a:solidFill>
+                  <a:srgbClr val="64748B"/>
                 </a:solidFill>
                 <a:latin typeface="Consolas" pitchFamily="34" charset="0"/>
                 <a:ea typeface="Consolas" pitchFamily="34" charset="-122"/>
                 <a:cs typeface="Consolas" pitchFamily="34" charset="-120"/>
               </a:rPr>
-              <a:t># Run any demo end-to-end</a:t>
-            </a:r>
-            <a:endParaRPr lang="en-US" sz="1300" dirty="0"/>
-          </a:p>
-          <a:p>
-            <a:pPr indent="0" marL="0">
-              <a:buNone/>
-            </a:pPr>
-            <a:r>
-              <a:rPr lang="en-US" sz="1300" dirty="0">
+              <a:t># ZGC (low-pause alt)</a:t>
+            </a:r>
+            <a:endParaRPr lang="en-US" sz="1100" dirty="0"/>
+          </a:p>
+        </p:txBody>
+      </p:sp>
+      <p:sp>
+        <p:nvSpPr>
+          <p:cNvPr id="15" name="Text 13"/>
+          <p:cNvSpPr/>
+          <p:nvPr/>
+        </p:nvSpPr>
+        <p:spPr>
+          <a:xfrm>
+            <a:off x="4846320" y="3886200"/>
+            <a:ext cx="3657600" cy="365760"/>
+          </a:xfrm>
+          <a:prstGeom prst="rect">
+            <a:avLst/>
+          </a:prstGeom>
+          <a:noFill/>
+          <a:ln/>
+        </p:spPr>
+        <p:txBody>
+          <a:bodyPr wrap="square" lIns="0" tIns="0" rIns="0" bIns="0" rtlCol="0" anchor="ctr"/>
+          <a:lstStyle/>
+          <a:p>
+            <a:pPr indent="0" marL="0">
+              <a:buNone/>
+            </a:pPr>
+            <a:r>
+              <a:rPr lang="en-US" sz="1400" dirty="0">
                 <a:solidFill>
                   <a:srgbClr val="F8FAFC"/>
                 </a:solidFill>
@@ -12301,24 +12906,274 @@
                 <a:ea typeface="Consolas" pitchFamily="34" charset="-122"/>
                 <a:cs typeface="Consolas" pitchFamily="34" charset="-120"/>
               </a:rPr>
-              <a:t>cd demo-01-three-signals &amp;&amp; ./demo.sh</a:t>
-            </a:r>
-            <a:endParaRPr lang="en-US" sz="1300" dirty="0"/>
-          </a:p>
-          <a:p>
-            <a:pPr indent="0" marL="0">
-              <a:buNone/>
-            </a:pPr>
-            <a:r>
-              <a:rPr lang="en-US" sz="1300" dirty="0">
-                <a:solidFill>
-                  <a:srgbClr val="F8FAFC"/>
+              <a:t>-XX:+UseZGC</a:t>
+            </a:r>
+            <a:endParaRPr lang="en-US" sz="1400" dirty="0"/>
+          </a:p>
+        </p:txBody>
+      </p:sp>
+      <p:sp>
+        <p:nvSpPr>
+          <p:cNvPr id="16" name="Text 14"/>
+          <p:cNvSpPr/>
+          <p:nvPr/>
+        </p:nvSpPr>
+        <p:spPr>
+          <a:xfrm>
+            <a:off x="457200" y="4754880"/>
+            <a:ext cx="5486400" cy="274320"/>
+          </a:xfrm>
+          <a:prstGeom prst="rect">
+            <a:avLst/>
+          </a:prstGeom>
+          <a:noFill/>
+          <a:ln/>
+        </p:spPr>
+        <p:txBody>
+          <a:bodyPr wrap="square" lIns="0" tIns="0" rIns="0" bIns="0" rtlCol="0" anchor="ctr"/>
+          <a:lstStyle/>
+          <a:p>
+            <a:pPr indent="0" marL="0">
+              <a:buNone/>
+            </a:pPr>
+            <a:r>
+              <a:rPr lang="en-US" sz="900" i="1" dirty="0">
+                <a:solidFill>
+                  <a:srgbClr val="64748B"/>
+                </a:solidFill>
+                <a:latin typeface="Calibri" pitchFamily="34" charset="0"/>
+                <a:ea typeface="Calibri" pitchFamily="34" charset="-122"/>
+                <a:cs typeface="Calibri" pitchFamily="34" charset="-120"/>
+              </a:rPr>
+              <a:t>Three Signals, One Story</a:t>
+            </a:r>
+            <a:endParaRPr lang="en-US" sz="900" dirty="0"/>
+          </a:p>
+        </p:txBody>
+      </p:sp>
+      <p:sp>
+        <p:nvSpPr>
+          <p:cNvPr id="17" name="Text 15"/>
+          <p:cNvSpPr/>
+          <p:nvPr/>
+        </p:nvSpPr>
+        <p:spPr>
+          <a:xfrm>
+            <a:off x="8229600" y="4754880"/>
+            <a:ext cx="457200" cy="274320"/>
+          </a:xfrm>
+          <a:prstGeom prst="rect">
+            <a:avLst/>
+          </a:prstGeom>
+          <a:noFill/>
+          <a:ln/>
+        </p:spPr>
+        <p:txBody>
+          <a:bodyPr wrap="square" lIns="0" tIns="0" rIns="0" bIns="0" rtlCol="0" anchor="ctr"/>
+          <a:lstStyle/>
+          <a:p>
+            <a:pPr algn="r" indent="0" marL="0">
+              <a:buNone/>
+            </a:pPr>
+            <a:r>
+              <a:rPr lang="en-US" sz="900" dirty="0">
+                <a:solidFill>
+                  <a:srgbClr val="64748B"/>
+                </a:solidFill>
+                <a:latin typeface="Calibri" pitchFamily="34" charset="0"/>
+                <a:ea typeface="Calibri" pitchFamily="34" charset="-122"/>
+                <a:cs typeface="Calibri" pitchFamily="34" charset="-120"/>
+              </a:rPr>
+              <a:t>28</a:t>
+            </a:r>
+            <a:endParaRPr lang="en-US" sz="900" dirty="0"/>
+          </a:p>
+        </p:txBody>
+      </p:sp>
+    </p:spTree>
+  </p:cSld>
+  <p:clrMapOvr>
+    <a:masterClrMapping/>
+  </p:clrMapOvr>
+</p:sld>
+</file>
+
+<file path=ppt/slides/slide29.xml><?xml version="1.0" encoding="utf-8"?>
+<p:sld xmlns:a="http://schemas.openxmlformats.org/drawingml/2006/main" xmlns:r="http://schemas.openxmlformats.org/officeDocument/2006/relationships" xmlns:p="http://schemas.openxmlformats.org/presentationml/2006/main">
+  <p:cSld name="Slide 29">
+    <p:bg>
+      <p:bgPr>
+        <a:solidFill>
+          <a:srgbClr val="FFFFFF"/>
+        </a:solidFill>
+      </p:bgPr>
+    </p:bg>
+    <p:spTree>
+      <p:nvGrpSpPr>
+        <p:cNvPr id="1" name=""/>
+        <p:cNvGrpSpPr/>
+        <p:nvPr/>
+      </p:nvGrpSpPr>
+      <p:grpSpPr>
+        <a:xfrm>
+          <a:off x="0" y="0"/>
+          <a:ext cx="0" cy="0"/>
+          <a:chOff x="0" y="0"/>
+          <a:chExt cx="0" cy="0"/>
+        </a:xfrm>
+      </p:grpSpPr>
+      <p:sp>
+        <p:nvSpPr>
+          <p:cNvPr id="2" name="Shape 0"/>
+          <p:cNvSpPr/>
+          <p:nvPr/>
+        </p:nvSpPr>
+        <p:spPr>
+          <a:xfrm>
+            <a:off x="457200" y="457200"/>
+            <a:ext cx="1188720" cy="548640"/>
+          </a:xfrm>
+          <a:prstGeom prst="rect">
+            <a:avLst/>
+          </a:prstGeom>
+          <a:solidFill>
+            <a:srgbClr val="14B8A6"/>
+          </a:solidFill>
+          <a:ln/>
+        </p:spPr>
+      </p:sp>
+      <p:sp>
+        <p:nvSpPr>
+          <p:cNvPr id="3" name="Text 1"/>
+          <p:cNvSpPr/>
+          <p:nvPr/>
+        </p:nvSpPr>
+        <p:spPr>
+          <a:xfrm>
+            <a:off x="457200" y="457200"/>
+            <a:ext cx="1188720" cy="548640"/>
+          </a:xfrm>
+          <a:prstGeom prst="rect">
+            <a:avLst/>
+          </a:prstGeom>
+          <a:noFill/>
+          <a:ln/>
+        </p:spPr>
+        <p:txBody>
+          <a:bodyPr wrap="square" lIns="0" tIns="0" rIns="0" bIns="0" rtlCol="0" anchor="ctr"/>
+          <a:lstStyle/>
+          <a:p>
+            <a:pPr algn="ctr" indent="0" marL="0">
+              <a:buNone/>
+            </a:pPr>
+            <a:r>
+              <a:rPr lang="en-US" sz="1600" b="1" dirty="0">
+                <a:solidFill>
+                  <a:srgbClr val="FFFFFF"/>
+                </a:solidFill>
+                <a:latin typeface="Calibri" pitchFamily="34" charset="0"/>
+                <a:ea typeface="Calibri" pitchFamily="34" charset="-122"/>
+                <a:cs typeface="Calibri" pitchFamily="34" charset="-120"/>
+              </a:rPr>
+              <a:t>Bonus</a:t>
+            </a:r>
+            <a:endParaRPr lang="en-US" sz="1600" dirty="0"/>
+          </a:p>
+        </p:txBody>
+      </p:sp>
+      <p:sp>
+        <p:nvSpPr>
+          <p:cNvPr id="4" name="Text 2"/>
+          <p:cNvSpPr/>
+          <p:nvPr/>
+        </p:nvSpPr>
+        <p:spPr>
+          <a:xfrm>
+            <a:off x="1828800" y="365760"/>
+            <a:ext cx="6858000" cy="731520"/>
+          </a:xfrm>
+          <a:prstGeom prst="rect">
+            <a:avLst/>
+          </a:prstGeom>
+          <a:noFill/>
+          <a:ln/>
+        </p:spPr>
+        <p:txBody>
+          <a:bodyPr wrap="square" lIns="0" tIns="0" rIns="0" bIns="0" rtlCol="0" anchor="ctr"/>
+          <a:lstStyle/>
+          <a:p>
+            <a:pPr indent="0" marL="0">
+              <a:buNone/>
+            </a:pPr>
+            <a:r>
+              <a:rPr lang="en-US" sz="2600" b="1" dirty="0">
+                <a:solidFill>
+                  <a:srgbClr val="0F172A"/>
+                </a:solidFill>
+                <a:latin typeface="Calibri" pitchFamily="34" charset="0"/>
+                <a:ea typeface="Calibri" pitchFamily="34" charset="-122"/>
+                <a:cs typeface="Calibri" pitchFamily="34" charset="-120"/>
+              </a:rPr>
+              <a:t>Reproduce on your laptop</a:t>
+            </a:r>
+            <a:endParaRPr lang="en-US" sz="2600" dirty="0"/>
+          </a:p>
+        </p:txBody>
+      </p:sp>
+      <p:sp>
+        <p:nvSpPr>
+          <p:cNvPr id="5" name="Shape 3"/>
+          <p:cNvSpPr/>
+          <p:nvPr/>
+        </p:nvSpPr>
+        <p:spPr>
+          <a:xfrm>
+            <a:off x="457200" y="1371600"/>
+            <a:ext cx="8229600" cy="3200400"/>
+          </a:xfrm>
+          <a:prstGeom prst="rect">
+            <a:avLst/>
+          </a:prstGeom>
+          <a:solidFill>
+            <a:srgbClr val="0F172A"/>
+          </a:solidFill>
+          <a:ln/>
+        </p:spPr>
+      </p:sp>
+      <p:sp>
+        <p:nvSpPr>
+          <p:cNvPr id="6" name="Text 4"/>
+          <p:cNvSpPr/>
+          <p:nvPr/>
+        </p:nvSpPr>
+        <p:spPr>
+          <a:xfrm>
+            <a:off x="731520" y="1508760"/>
+            <a:ext cx="7680960" cy="2926080"/>
+          </a:xfrm>
+          <a:prstGeom prst="rect">
+            <a:avLst/>
+          </a:prstGeom>
+          <a:noFill/>
+          <a:ln/>
+        </p:spPr>
+        <p:txBody>
+          <a:bodyPr wrap="square" rtlCol="0" anchor="ctr"/>
+          <a:lstStyle/>
+          <a:p>
+            <a:pPr indent="0" marL="0">
+              <a:buNone/>
+            </a:pPr>
+            <a:r>
+              <a:rPr lang="en-US" sz="1300" i="1" dirty="0">
+                <a:solidFill>
+                  <a:srgbClr val="14B8A6"/>
                 </a:solidFill>
                 <a:latin typeface="Consolas" pitchFamily="34" charset="0"/>
                 <a:ea typeface="Consolas" pitchFamily="34" charset="-122"/>
                 <a:cs typeface="Consolas" pitchFamily="34" charset="-120"/>
               </a:rPr>
-              <a:t>cd demo-02-cardinality &amp;&amp; ./demo.sh</a:t>
+              <a:t># Prereqs</a:t>
             </a:r>
             <a:endParaRPr lang="en-US" sz="1300" dirty="0"/>
           </a:p>
@@ -12335,8 +13190,14 @@
                 <a:ea typeface="Consolas" pitchFamily="34" charset="-122"/>
                 <a:cs typeface="Consolas" pitchFamily="34" charset="-120"/>
               </a:rPr>
-              <a:t>cd demo-03-tail-sampling &amp;&amp; ./demo.sh</a:t>
-            </a:r>
+              <a:t>Fedora 43+ / Ubuntu 24+, podman 5.x, JDK 25 (Temurin)</a:t>
+            </a:r>
+            <a:endParaRPr lang="en-US" sz="1300" dirty="0"/>
+          </a:p>
+          <a:p>
+            <a:pPr indent="0" marL="0">
+              <a:buNone/>
+            </a:pPr>
             <a:endParaRPr lang="en-US" sz="1300" dirty="0"/>
           </a:p>
           <a:p>
@@ -12352,7 +13213,7 @@
                 <a:ea typeface="Consolas" pitchFamily="34" charset="-122"/>
                 <a:cs typeface="Consolas" pitchFamily="34" charset="-120"/>
               </a:rPr>
-              <a:t>cd demo-04-jvm-metrics-shenandoah &amp;&amp; ./demo.sh</a:t>
+              <a:t>git clone github.com/patterncatalyst/otel-observability-demos</a:t>
             </a:r>
             <a:endParaRPr lang="en-US" sz="1300" dirty="0"/>
           </a:p>
@@ -12360,22 +13221,16 @@
             <a:pPr indent="0" marL="0">
               <a:buNone/>
             </a:pPr>
-            <a:endParaRPr lang="en-US" sz="1300" dirty="0"/>
-          </a:p>
-          <a:p>
-            <a:pPr indent="0" marL="0">
-              <a:buNone/>
-            </a:pPr>
-            <a:r>
-              <a:rPr lang="en-US" sz="1300" i="1" dirty="0">
-                <a:solidFill>
-                  <a:srgbClr val="14B8A6"/>
+            <a:r>
+              <a:rPr lang="en-US" sz="1300" dirty="0">
+                <a:solidFill>
+                  <a:srgbClr val="F8FAFC"/>
                 </a:solidFill>
                 <a:latin typeface="Consolas" pitchFamily="34" charset="0"/>
                 <a:ea typeface="Consolas" pitchFamily="34" charset="-122"/>
                 <a:cs typeface="Consolas" pitchFamily="34" charset="-120"/>
               </a:rPr>
-              <a:t># The headline: 6-way cold start comparison (~6 minutes)</a:t>
+              <a:t>cd otel-observability-demos</a:t>
             </a:r>
             <a:endParaRPr lang="en-US" sz="1300" dirty="0"/>
           </a:p>
@@ -12383,15 +13238,129 @@
             <a:pPr indent="0" marL="0">
               <a:buNone/>
             </a:pPr>
-            <a:r>
-              <a:rPr lang="en-US" sz="1300" dirty="0">
-                <a:solidFill>
-                  <a:srgbClr val="F8FAFC"/>
+            <a:endParaRPr lang="en-US" sz="1300" dirty="0"/>
+          </a:p>
+          <a:p>
+            <a:pPr indent="0" marL="0">
+              <a:buNone/>
+            </a:pPr>
+            <a:r>
+              <a:rPr lang="en-US" sz="1300" i="1" dirty="0">
+                <a:solidFill>
+                  <a:srgbClr val="14B8A6"/>
                 </a:solidFill>
                 <a:latin typeface="Consolas" pitchFamily="34" charset="0"/>
                 <a:ea typeface="Consolas" pitchFamily="34" charset="-122"/>
                 <a:cs typeface="Consolas" pitchFamily="34" charset="-120"/>
               </a:rPr>
+              <a:t># Run any demo end-to-end</a:t>
+            </a:r>
+            <a:endParaRPr lang="en-US" sz="1300" dirty="0"/>
+          </a:p>
+          <a:p>
+            <a:pPr indent="0" marL="0">
+              <a:buNone/>
+            </a:pPr>
+            <a:r>
+              <a:rPr lang="en-US" sz="1300" dirty="0">
+                <a:solidFill>
+                  <a:srgbClr val="F8FAFC"/>
+                </a:solidFill>
+                <a:latin typeface="Consolas" pitchFamily="34" charset="0"/>
+                <a:ea typeface="Consolas" pitchFamily="34" charset="-122"/>
+                <a:cs typeface="Consolas" pitchFamily="34" charset="-120"/>
+              </a:rPr>
+              <a:t>cd demo-01-three-signals &amp;&amp; ./demo.sh</a:t>
+            </a:r>
+            <a:endParaRPr lang="en-US" sz="1300" dirty="0"/>
+          </a:p>
+          <a:p>
+            <a:pPr indent="0" marL="0">
+              <a:buNone/>
+            </a:pPr>
+            <a:r>
+              <a:rPr lang="en-US" sz="1300" dirty="0">
+                <a:solidFill>
+                  <a:srgbClr val="F8FAFC"/>
+                </a:solidFill>
+                <a:latin typeface="Consolas" pitchFamily="34" charset="0"/>
+                <a:ea typeface="Consolas" pitchFamily="34" charset="-122"/>
+                <a:cs typeface="Consolas" pitchFamily="34" charset="-120"/>
+              </a:rPr>
+              <a:t>cd demo-02-cardinality &amp;&amp; ./demo.sh</a:t>
+            </a:r>
+            <a:endParaRPr lang="en-US" sz="1300" dirty="0"/>
+          </a:p>
+          <a:p>
+            <a:pPr indent="0" marL="0">
+              <a:buNone/>
+            </a:pPr>
+            <a:r>
+              <a:rPr lang="en-US" sz="1300" dirty="0">
+                <a:solidFill>
+                  <a:srgbClr val="F8FAFC"/>
+                </a:solidFill>
+                <a:latin typeface="Consolas" pitchFamily="34" charset="0"/>
+                <a:ea typeface="Consolas" pitchFamily="34" charset="-122"/>
+                <a:cs typeface="Consolas" pitchFamily="34" charset="-120"/>
+              </a:rPr>
+              <a:t>cd demo-03-tail-sampling &amp;&amp; ./demo.sh</a:t>
+            </a:r>
+            <a:endParaRPr lang="en-US" sz="1300" dirty="0"/>
+          </a:p>
+          <a:p>
+            <a:pPr indent="0" marL="0">
+              <a:buNone/>
+            </a:pPr>
+            <a:r>
+              <a:rPr lang="en-US" sz="1300" dirty="0">
+                <a:solidFill>
+                  <a:srgbClr val="F8FAFC"/>
+                </a:solidFill>
+                <a:latin typeface="Consolas" pitchFamily="34" charset="0"/>
+                <a:ea typeface="Consolas" pitchFamily="34" charset="-122"/>
+                <a:cs typeface="Consolas" pitchFamily="34" charset="-120"/>
+              </a:rPr>
+              <a:t>cd demo-04-jvm-metrics-shenandoah &amp;&amp; ./demo.sh</a:t>
+            </a:r>
+            <a:endParaRPr lang="en-US" sz="1300" dirty="0"/>
+          </a:p>
+          <a:p>
+            <a:pPr indent="0" marL="0">
+              <a:buNone/>
+            </a:pPr>
+            <a:endParaRPr lang="en-US" sz="1300" dirty="0"/>
+          </a:p>
+          <a:p>
+            <a:pPr indent="0" marL="0">
+              <a:buNone/>
+            </a:pPr>
+            <a:r>
+              <a:rPr lang="en-US" sz="1300" i="1" dirty="0">
+                <a:solidFill>
+                  <a:srgbClr val="14B8A6"/>
+                </a:solidFill>
+                <a:latin typeface="Consolas" pitchFamily="34" charset="0"/>
+                <a:ea typeface="Consolas" pitchFamily="34" charset="-122"/>
+                <a:cs typeface="Consolas" pitchFamily="34" charset="-120"/>
+              </a:rPr>
+              <a:t># The headline: 8-way cold start comparison (~10 minutes)</a:t>
+            </a:r>
+            <a:endParaRPr lang="en-US" sz="1300" dirty="0"/>
+          </a:p>
+          <a:p>
+            <a:pPr indent="0" marL="0">
+              <a:buNone/>
+            </a:pPr>
+            <a:r>
+              <a:rPr lang="en-US" sz="1300" dirty="0">
+                <a:solidFill>
+                  <a:srgbClr val="F8FAFC"/>
+                </a:solidFill>
+                <a:latin typeface="Consolas" pitchFamily="34" charset="0"/>
+                <a:ea typeface="Consolas" pitchFamily="34" charset="-122"/>
+                <a:cs typeface="Consolas" pitchFamily="34" charset="-120"/>
+              </a:rPr>
               <a:t>cd demo-05-aot-coldstart &amp;&amp; ./demo.sh time-all</a:t>
             </a:r>
             <a:endParaRPr lang="en-US" sz="1300" dirty="0"/>
@@ -12470,7 +13439,7 @@
                 <a:ea typeface="Calibri" pitchFamily="34" charset="-122"/>
                 <a:cs typeface="Calibri" pitchFamily="34" charset="-120"/>
               </a:rPr>
-              <a:t>28</a:t>
+              <a:t>29</a:t>
             </a:r>
             <a:endParaRPr lang="en-US" sz="900" dirty="0"/>
           </a:p>
@@ -13326,7 +14295,7 @@
                 <a:ea typeface="Calibri" pitchFamily="34" charset="-122"/>
                 <a:cs typeface="Calibri" pitchFamily="34" charset="-120"/>
               </a:rPr>
-              <a:t>AOT Cold Start</a:t>
+              <a:t>Cold Start: Frameworks Compared</a:t>
             </a:r>
             <a:endParaRPr lang="en-US" sz="1600" dirty="0"/>
           </a:p>
@@ -13365,7 +14334,7 @@
                 <a:ea typeface="Calibri" pitchFamily="34" charset="-122"/>
                 <a:cs typeface="Calibri" pitchFamily="34" charset="-120"/>
               </a:rPr>
-              <a:t>JDK 25 AOT cache vs OTel agent: real numbers</a:t>
+              <a:t>Spring Boot 4 vs Quarkus, same JDK + Leyden</a:t>
             </a:r>
             <a:endParaRPr lang="en-US" sz="1300" dirty="0"/>
           </a:p>
